--- a/slides/Corso_Python_Campobasso_v1.pptx
+++ b/slides/Corso_Python_Campobasso_v1.pptx
@@ -576,13 +576,29 @@
           <a:lstStyle/>
           <a:p>
             <a:r>
-              <a:t>⏱️ TEMPO STIMATO: 10 Minuti</a:t>
+              <a:t>🎯 OBIETTIVO DIDATTICO:</a:t>
+            </a:r>
+          </a:p>
+          <a:p>
+            <a:r>
+              <a:t>Slide di apertura del corso.</a:t>
             </a:r>
           </a:p>
           <a:p/>
           <a:p>
             <a:r>
-              <a:t>📘 SPIEGAZIONE PER IL DOCENTE:</a:t>
+              <a:t>⏱️ TIMING:</a:t>
+            </a:r>
+          </a:p>
+          <a:p>
+            <a:r>
+              <a:t>10 Minuti</a:t>
+            </a:r>
+          </a:p>
+          <a:p/>
+          <a:p>
+            <a:r>
+              <a:t>📘 GUIDA DOCENTE:</a:t>
             </a:r>
           </a:p>
           <a:p>
@@ -593,7 +609,7 @@
           <a:p/>
           <a:p>
             <a:r>
-              <a:t>💡 SUGGERIMENTI DI CONDUZIONE D'AULA:</a:t>
+              <a:t>💻 DEMO / LABORATORIO:</a:t>
             </a:r>
           </a:p>
           <a:p>
@@ -601,10 +617,26 @@
               <a:t>Chiedere agli studenti quali strumenti utilizzano attualmente in azienda (Excel, PowerBI, SQL, gestionali) e quali colli di bottiglia riscontrano quotidianamente.</a:t>
             </a:r>
           </a:p>
+          <a:p>
+            <a:r>
+              <a:t>Esecuzione live della demo a schermo e affiancamento degli studenti nello svolgimento dell'esercitazione associata nel notebook/script di laboratorio.</a:t>
+            </a:r>
+          </a:p>
           <a:p/>
           <a:p>
             <a:r>
-              <a:t>❓ DOMANDE CHIAVE DA PORRE AGLI STUDENTI:</a:t>
+              <a:t>⚠️ ERRORI TIPICI:</a:t>
+            </a:r>
+          </a:p>
+          <a:p>
+            <a:r>
+              <a:t>Confusione sintattica tra formati, mancata gestione delle eccezioni o dimenticanza nell'uso di .copy() sulle viste dei dati.</a:t>
+            </a:r>
+          </a:p>
+          <a:p/>
+          <a:p>
+            <a:r>
+              <a:t>❓ DOMANDE AULA:</a:t>
             </a:r>
           </a:p>
           <a:p>
@@ -679,13 +711,29 @@
           <a:lstStyle/>
           <a:p>
             <a:r>
-              <a:t>⏱️ TEMPO STIMATO: 15 Minuti</a:t>
+              <a:t>🎯 OBIETTIVO DIDATTICO:</a:t>
+            </a:r>
+          </a:p>
+          <a:p>
+            <a:r>
+              <a:t>Mostrare come identificare immediatamente colonne sporche o con valori nulli tramite info().</a:t>
             </a:r>
           </a:p>
           <a:p/>
           <a:p>
             <a:r>
-              <a:t>📘 SPIEGAZIONE PER IL DOCENTE:</a:t>
+              <a:t>⏱️ TIMING:</a:t>
+            </a:r>
+          </a:p>
+          <a:p>
+            <a:r>
+              <a:t>15 Minuti</a:t>
+            </a:r>
+          </a:p>
+          <a:p/>
+          <a:p>
+            <a:r>
+              <a:t>📘 GUIDA DOCENTE:</a:t>
             </a:r>
           </a:p>
           <a:p>
@@ -696,7 +744,7 @@
           <a:p/>
           <a:p>
             <a:r>
-              <a:t>💡 SUGGERIMENTI DI CONDUZIONE D'AULA:</a:t>
+              <a:t>💻 DEMO / LABORATORIO:</a:t>
             </a:r>
           </a:p>
           <a:p>
@@ -704,10 +752,26 @@
               <a:t>Far notare che Prezzo_Unitario è di tipo 'object' perché contiene simboli di valuta.</a:t>
             </a:r>
           </a:p>
+          <a:p>
+            <a:r>
+              <a:t>Esecuzione live della demo a schermo e affiancamento degli studenti nello svolgimento dell'esercitazione associata nel notebook/script di laboratorio.</a:t>
+            </a:r>
+          </a:p>
           <a:p/>
           <a:p>
             <a:r>
-              <a:t>❓ DOMANDE CHIAVE DA PORRE AGLI STUDENTI:</a:t>
+              <a:t>⚠️ ERRORI TIPICI:</a:t>
+            </a:r>
+          </a:p>
+          <a:p>
+            <a:r>
+              <a:t>Confusione sintattica tra formati, mancata gestione delle eccezioni o dimenticanza nell'uso di .copy() sulle viste dei dati.</a:t>
+            </a:r>
+          </a:p>
+          <a:p/>
+          <a:p>
+            <a:r>
+              <a:t>❓ DOMANDE AULA:</a:t>
             </a:r>
           </a:p>
           <a:p>
@@ -782,13 +846,29 @@
           <a:lstStyle/>
           <a:p>
             <a:r>
-              <a:t>⏱️ TEMPO STIMATO: 15 Minuti</a:t>
+              <a:t>🎯 OBIETTIVO DIDATTICO:</a:t>
+            </a:r>
+          </a:p>
+          <a:p>
+            <a:r>
+              <a:t>Chiarire la distinzione tra singola quadra e doppia quadra.</a:t>
             </a:r>
           </a:p>
           <a:p/>
           <a:p>
             <a:r>
-              <a:t>📘 SPIEGAZIONE PER IL DOCENTE:</a:t>
+              <a:t>⏱️ TIMING:</a:t>
+            </a:r>
+          </a:p>
+          <a:p>
+            <a:r>
+              <a:t>15 Minuti</a:t>
+            </a:r>
+          </a:p>
+          <a:p/>
+          <a:p>
+            <a:r>
+              <a:t>📘 GUIDA DOCENTE:</a:t>
             </a:r>
           </a:p>
           <a:p>
@@ -799,7 +879,7 @@
           <a:p/>
           <a:p>
             <a:r>
-              <a:t>💡 SUGGERIMENTI DI CONDUZIONE D'AULA:</a:t>
+              <a:t>💻 DEMO / LABORATORIO:</a:t>
             </a:r>
           </a:p>
           <a:p>
@@ -807,10 +887,26 @@
               <a:t>Mostrare la differenza di tipo tra Series e DataFrame.</a:t>
             </a:r>
           </a:p>
+          <a:p>
+            <a:r>
+              <a:t>Esecuzione live della demo a schermo e affiancamento degli studenti nello svolgimento dell'esercitazione associata nel notebook/script di laboratorio.</a:t>
+            </a:r>
+          </a:p>
           <a:p/>
           <a:p>
             <a:r>
-              <a:t>❓ DOMANDE CHIAVE DA PORRE AGLI STUDENTI:</a:t>
+              <a:t>⚠️ ERRORI TIPICI:</a:t>
+            </a:r>
+          </a:p>
+          <a:p>
+            <a:r>
+              <a:t>Confusione sintattica tra formati, mancata gestione delle eccezioni o dimenticanza nell'uso di .copy() sulle viste dei dati.</a:t>
+            </a:r>
+          </a:p>
+          <a:p/>
+          <a:p>
+            <a:r>
+              <a:t>❓ DOMANDE AULA:</a:t>
             </a:r>
           </a:p>
           <a:p>
@@ -885,13 +981,29 @@
           <a:lstStyle/>
           <a:p>
             <a:r>
-              <a:t>⏱️ TEMPO STIMATO: 15 Minuti</a:t>
+              <a:t>🎯 OBIETTIVO DIDATTICO:</a:t>
+            </a:r>
+          </a:p>
+          <a:p>
+            <a:r>
+              <a:t>Fissare bene la differenza tra coordinate numeriche (.</a:t>
             </a:r>
           </a:p>
           <a:p/>
           <a:p>
             <a:r>
-              <a:t>📘 SPIEGAZIONE PER IL DOCENTE:</a:t>
+              <a:t>⏱️ TIMING:</a:t>
+            </a:r>
+          </a:p>
+          <a:p>
+            <a:r>
+              <a:t>15 Minuti</a:t>
+            </a:r>
+          </a:p>
+          <a:p/>
+          <a:p>
+            <a:r>
+              <a:t>📘 GUIDA DOCENTE:</a:t>
             </a:r>
           </a:p>
           <a:p>
@@ -902,7 +1014,7 @@
           <a:p/>
           <a:p>
             <a:r>
-              <a:t>💡 SUGGERIMENTI DI CONDUZIONE D'AULA:</a:t>
+              <a:t>💻 DEMO / LABORATORIO:</a:t>
             </a:r>
           </a:p>
           <a:p>
@@ -910,10 +1022,26 @@
               <a:t>Dimostrare l'inclusione degli estremi in .loc vs esclusione in .iloc.</a:t>
             </a:r>
           </a:p>
+          <a:p>
+            <a:r>
+              <a:t>Esecuzione live della demo a schermo e affiancamento degli studenti nello svolgimento dell'esercitazione associata nel notebook/script di laboratorio.</a:t>
+            </a:r>
+          </a:p>
           <a:p/>
           <a:p>
             <a:r>
-              <a:t>❓ DOMANDE CHIAVE DA PORRE AGLI STUDENTI:</a:t>
+              <a:t>⚠️ ERRORI TIPICI:</a:t>
+            </a:r>
+          </a:p>
+          <a:p>
+            <a:r>
+              <a:t>Confusione sintattica tra formati, mancata gestione delle eccezioni o dimenticanza nell'uso di .copy() sulle viste dei dati.</a:t>
+            </a:r>
+          </a:p>
+          <a:p/>
+          <a:p>
+            <a:r>
+              <a:t>❓ DOMANDE AULA:</a:t>
             </a:r>
           </a:p>
           <a:p>
@@ -988,13 +1116,29 @@
           <a:lstStyle/>
           <a:p>
             <a:r>
-              <a:t>⏱️ TEMPO STIMATO: 15 Minuti</a:t>
+              <a:t>🎯 OBIETTIVO DIDATTICO:</a:t>
+            </a:r>
+          </a:p>
+          <a:p>
+            <a:r>
+              <a:t>Spiegare il concetto di maschera booleana (vettore di True/False).</a:t>
             </a:r>
           </a:p>
           <a:p/>
           <a:p>
             <a:r>
-              <a:t>📘 SPIEGAZIONE PER IL DOCENTE:</a:t>
+              <a:t>⏱️ TIMING:</a:t>
+            </a:r>
+          </a:p>
+          <a:p>
+            <a:r>
+              <a:t>15 Minuti</a:t>
+            </a:r>
+          </a:p>
+          <a:p/>
+          <a:p>
+            <a:r>
+              <a:t>📘 GUIDA DOCENTE:</a:t>
             </a:r>
           </a:p>
           <a:p>
@@ -1005,7 +1149,7 @@
           <a:p/>
           <a:p>
             <a:r>
-              <a:t>💡 SUGGERIMENTI DI CONDUZIONE D'AULA:</a:t>
+              <a:t>💻 DEMO / LABORATORIO:</a:t>
             </a:r>
           </a:p>
           <a:p>
@@ -1013,10 +1157,26 @@
               <a:t>Mostrare come il conteggio dei True corrisponda esattamente al numero di ordini.</a:t>
             </a:r>
           </a:p>
+          <a:p>
+            <a:r>
+              <a:t>Esecuzione live della demo a schermo e affiancamento degli studenti nello svolgimento dell'esercitazione associata nel notebook/script di laboratorio.</a:t>
+            </a:r>
+          </a:p>
           <a:p/>
           <a:p>
             <a:r>
-              <a:t>❓ DOMANDE CHIAVE DA PORRE AGLI STUDENTI:</a:t>
+              <a:t>⚠️ ERRORI TIPICI:</a:t>
+            </a:r>
+          </a:p>
+          <a:p>
+            <a:r>
+              <a:t>Confusione sintattica tra formati, mancata gestione delle eccezioni o dimenticanza nell'uso di .copy() sulle viste dei dati.</a:t>
+            </a:r>
+          </a:p>
+          <a:p/>
+          <a:p>
+            <a:r>
+              <a:t>❓ DOMANDE AULA:</a:t>
             </a:r>
           </a:p>
           <a:p>
@@ -1091,13 +1251,29 @@
           <a:lstStyle/>
           <a:p>
             <a:r>
-              <a:t>⏱️ TEMPO STIMATO: 15 Minuti</a:t>
+              <a:t>🎯 OBIETTIVO DIDATTICO:</a:t>
+            </a:r>
+          </a:p>
+          <a:p>
+            <a:r>
+              <a:t>Insistere sull'errore più comune dei principianti: dimenticare le parentesi tonde.</a:t>
             </a:r>
           </a:p>
           <a:p/>
           <a:p>
             <a:r>
-              <a:t>📘 SPIEGAZIONE PER IL DOCENTE:</a:t>
+              <a:t>⏱️ TIMING:</a:t>
+            </a:r>
+          </a:p>
+          <a:p>
+            <a:r>
+              <a:t>15 Minuti</a:t>
+            </a:r>
+          </a:p>
+          <a:p/>
+          <a:p>
+            <a:r>
+              <a:t>📘 GUIDA DOCENTE:</a:t>
             </a:r>
           </a:p>
           <a:p>
@@ -1108,7 +1284,7 @@
           <a:p/>
           <a:p>
             <a:r>
-              <a:t>💡 SUGGERIMENTI DI CONDUZIONE D'AULA:</a:t>
+              <a:t>💻 DEMO / LABORATORIO:</a:t>
             </a:r>
           </a:p>
           <a:p>
@@ -1116,10 +1292,26 @@
               <a:t>Spiegare la precedenza degli operatori in Python.</a:t>
             </a:r>
           </a:p>
+          <a:p>
+            <a:r>
+              <a:t>Esecuzione live della demo a schermo e affiancamento degli studenti nello svolgimento dell'esercitazione associata nel notebook/script di laboratorio.</a:t>
+            </a:r>
+          </a:p>
           <a:p/>
           <a:p>
             <a:r>
-              <a:t>❓ DOMANDE CHIAVE DA PORRE AGLI STUDENTI:</a:t>
+              <a:t>⚠️ ERRORI TIPICI:</a:t>
+            </a:r>
+          </a:p>
+          <a:p>
+            <a:r>
+              <a:t>Confusione sintattica tra formati, mancata gestione delle eccezioni o dimenticanza nell'uso di .copy() sulle viste dei dati.</a:t>
+            </a:r>
+          </a:p>
+          <a:p/>
+          <a:p>
+            <a:r>
+              <a:t>❓ DOMANDE AULA:</a:t>
             </a:r>
           </a:p>
           <a:p>
@@ -1194,13 +1386,29 @@
           <a:lstStyle/>
           <a:p>
             <a:r>
-              <a:t>⏱️ TEMPO STIMATO: 15 Minuti</a:t>
+              <a:t>🎯 OBIETTIVO DIDATTICO:</a:t>
+            </a:r>
+          </a:p>
+          <a:p>
+            <a:r>
+              <a:t>Mostrare l'efficacia di.</a:t>
             </a:r>
           </a:p>
           <a:p/>
           <a:p>
             <a:r>
-              <a:t>📘 SPIEGAZIONE PER IL DOCENTE:</a:t>
+              <a:t>⏱️ TIMING:</a:t>
+            </a:r>
+          </a:p>
+          <a:p>
+            <a:r>
+              <a:t>15 Minuti</a:t>
+            </a:r>
+          </a:p>
+          <a:p/>
+          <a:p>
+            <a:r>
+              <a:t>📘 GUIDA DOCENTE:</a:t>
             </a:r>
           </a:p>
           <a:p>
@@ -1211,7 +1419,7 @@
           <a:p/>
           <a:p>
             <a:r>
-              <a:t>💡 SUGGERIMENTI DI CONDUZIONE D'AULA:</a:t>
+              <a:t>💻 DEMO / LABORATORIO:</a:t>
             </a:r>
           </a:p>
           <a:p>
@@ -1219,10 +1427,26 @@
               <a:t>Far provare la ricerca su nomi prodotto diversi.</a:t>
             </a:r>
           </a:p>
+          <a:p>
+            <a:r>
+              <a:t>Esecuzione live della demo a schermo e affiancamento degli studenti nello svolgimento dell'esercitazione associata nel notebook/script di laboratorio.</a:t>
+            </a:r>
+          </a:p>
           <a:p/>
           <a:p>
             <a:r>
-              <a:t>❓ DOMANDE CHIAVE DA PORRE AGLI STUDENTI:</a:t>
+              <a:t>⚠️ ERRORI TIPICI:</a:t>
+            </a:r>
+          </a:p>
+          <a:p>
+            <a:r>
+              <a:t>Confusione sintattica tra formati, mancata gestione delle eccezioni o dimenticanza nell'uso di .copy() sulle viste dei dati.</a:t>
+            </a:r>
+          </a:p>
+          <a:p/>
+          <a:p>
+            <a:r>
+              <a:t>❓ DOMANDE AULA:</a:t>
             </a:r>
           </a:p>
           <a:p>
@@ -1297,13 +1521,29 @@
           <a:lstStyle/>
           <a:p>
             <a:r>
-              <a:t>⏱️ TEMPO STIMATO: 15 Minuti</a:t>
+              <a:t>🎯 OBIETTIVO DIDATTICO:</a:t>
+            </a:r>
+          </a:p>
+          <a:p>
+            <a:r>
+              <a:t>Spiegare perché i cicli for in Pandas sono un anti-pattern da evitare.</a:t>
             </a:r>
           </a:p>
           <a:p/>
           <a:p>
             <a:r>
-              <a:t>📘 SPIEGAZIONE PER IL DOCENTE:</a:t>
+              <a:t>⏱️ TIMING:</a:t>
+            </a:r>
+          </a:p>
+          <a:p>
+            <a:r>
+              <a:t>15 Minuti</a:t>
+            </a:r>
+          </a:p>
+          <a:p/>
+          <a:p>
+            <a:r>
+              <a:t>📘 GUIDA DOCENTE:</a:t>
             </a:r>
           </a:p>
           <a:p>
@@ -1314,7 +1554,7 @@
           <a:p/>
           <a:p>
             <a:r>
-              <a:t>💡 SUGGERIMENTI DI CONDUZIONE D'AULA:</a:t>
+              <a:t>💻 DEMO / LABORATORIO:</a:t>
             </a:r>
           </a:p>
           <a:p>
@@ -1322,10 +1562,26 @@
               <a:t>Confrontare i millisecondi di un'operazione vettoriale vs iterrows().</a:t>
             </a:r>
           </a:p>
+          <a:p>
+            <a:r>
+              <a:t>Esecuzione live della demo a schermo e affiancamento degli studenti nello svolgimento dell'esercitazione associata nel notebook/script di laboratorio.</a:t>
+            </a:r>
+          </a:p>
           <a:p/>
           <a:p>
             <a:r>
-              <a:t>❓ DOMANDE CHIAVE DA PORRE AGLI STUDENTI:</a:t>
+              <a:t>⚠️ ERRORI TIPICI:</a:t>
+            </a:r>
+          </a:p>
+          <a:p>
+            <a:r>
+              <a:t>Confusione sintattica tra formati, mancata gestione delle eccezioni o dimenticanza nell'uso di .copy() sulle viste dei dati.</a:t>
+            </a:r>
+          </a:p>
+          <a:p/>
+          <a:p>
+            <a:r>
+              <a:t>❓ DOMANDE AULA:</a:t>
             </a:r>
           </a:p>
           <a:p>
@@ -1400,13 +1656,29 @@
           <a:lstStyle/>
           <a:p>
             <a:r>
-              <a:t>⏱️ TEMPO STIMATO: 15 Minuti</a:t>
+              <a:t>🎯 OBIETTIVO DIDATTICO:</a:t>
+            </a:r>
+          </a:p>
+          <a:p>
+            <a:r>
+              <a:t>Spiegare il parametro errors='coerce' come salvavita contro crash improvvisi di pipeline.</a:t>
             </a:r>
           </a:p>
           <a:p/>
           <a:p>
             <a:r>
-              <a:t>📘 SPIEGAZIONE PER IL DOCENTE:</a:t>
+              <a:t>⏱️ TIMING:</a:t>
+            </a:r>
+          </a:p>
+          <a:p>
+            <a:r>
+              <a:t>15 Minuti</a:t>
+            </a:r>
+          </a:p>
+          <a:p/>
+          <a:p>
+            <a:r>
+              <a:t>📘 GUIDA DOCENTE:</a:t>
             </a:r>
           </a:p>
           <a:p>
@@ -1417,7 +1689,7 @@
           <a:p/>
           <a:p>
             <a:r>
-              <a:t>💡 SUGGERIMENTI DI CONDUZIONE D'AULA:</a:t>
+              <a:t>💻 DEMO / LABORATORIO:</a:t>
             </a:r>
           </a:p>
           <a:p>
@@ -1425,10 +1697,26 @@
               <a:t>Mostrare quante celle sono state convertite a NaN e perché.</a:t>
             </a:r>
           </a:p>
+          <a:p>
+            <a:r>
+              <a:t>Esecuzione live della demo a schermo e affiancamento degli studenti nello svolgimento dell'esercitazione associata nel notebook/script di laboratorio.</a:t>
+            </a:r>
+          </a:p>
           <a:p/>
           <a:p>
             <a:r>
-              <a:t>❓ DOMANDE CHIAVE DA PORRE AGLI STUDENTI:</a:t>
+              <a:t>⚠️ ERRORI TIPICI:</a:t>
+            </a:r>
+          </a:p>
+          <a:p>
+            <a:r>
+              <a:t>Confusione sintattica tra formati, mancata gestione delle eccezioni o dimenticanza nell'uso di .copy() sulle viste dei dati.</a:t>
+            </a:r>
+          </a:p>
+          <a:p/>
+          <a:p>
+            <a:r>
+              <a:t>❓ DOMANDE AULA:</a:t>
             </a:r>
           </a:p>
           <a:p>
@@ -1503,13 +1791,29 @@
           <a:lstStyle/>
           <a:p>
             <a:r>
-              <a:t>⏱️ TEMPO STIMATO: 15 Minuti</a:t>
+              <a:t>🎯 OBIETTIVO DIDATTICO:</a:t>
+            </a:r>
+          </a:p>
+          <a:p>
+            <a:r>
+              <a:t>Verificare che tutti gli studenti abbiano ottenuto colonne numeriche coerenti.</a:t>
             </a:r>
           </a:p>
           <a:p/>
           <a:p>
             <a:r>
-              <a:t>📘 SPIEGAZIONE PER IL DOCENTE:</a:t>
+              <a:t>⏱️ TIMING:</a:t>
+            </a:r>
+          </a:p>
+          <a:p>
+            <a:r>
+              <a:t>15 Minuti</a:t>
+            </a:r>
+          </a:p>
+          <a:p/>
+          <a:p>
+            <a:r>
+              <a:t>📘 GUIDA DOCENTE:</a:t>
             </a:r>
           </a:p>
           <a:p>
@@ -1520,7 +1824,7 @@
           <a:p/>
           <a:p>
             <a:r>
-              <a:t>💡 SUGGERIMENTI DI CONDUZIONE D'AULA:</a:t>
+              <a:t>💻 DEMO / LABORATORIO:</a:t>
             </a:r>
           </a:p>
           <a:p>
@@ -1528,10 +1832,26 @@
               <a:t>Far notare l'importanza dell'arrotondamento per evitare problemi di precisione in virgola mobile.</a:t>
             </a:r>
           </a:p>
+          <a:p>
+            <a:r>
+              <a:t>Esecuzione live della demo a schermo e affiancamento degli studenti nello svolgimento dell'esercitazione associata nel notebook/script di laboratorio.</a:t>
+            </a:r>
+          </a:p>
           <a:p/>
           <a:p>
             <a:r>
-              <a:t>❓ DOMANDE CHIAVE DA PORRE AGLI STUDENTI:</a:t>
+              <a:t>⚠️ ERRORI TIPICI:</a:t>
+            </a:r>
+          </a:p>
+          <a:p>
+            <a:r>
+              <a:t>Confusione sintattica tra formati, mancata gestione delle eccezioni o dimenticanza nell'uso di .copy() sulle viste dei dati.</a:t>
+            </a:r>
+          </a:p>
+          <a:p/>
+          <a:p>
+            <a:r>
+              <a:t>❓ DOMANDE AULA:</a:t>
             </a:r>
           </a:p>
           <a:p>
@@ -1606,13 +1926,29 @@
           <a:lstStyle/>
           <a:p>
             <a:r>
-              <a:t>⏱️ TEMPO STIMATO: 15 Minuti</a:t>
+              <a:t>🎯 OBIETTIVO DIDATTICO:</a:t>
+            </a:r>
+          </a:p>
+          <a:p>
+            <a:r>
+              <a:t>Mostrare l'applicazione del ranking sui contratti ad alto valore.</a:t>
             </a:r>
           </a:p>
           <a:p/>
           <a:p>
             <a:r>
-              <a:t>📘 SPIEGAZIONE PER IL DOCENTE:</a:t>
+              <a:t>⏱️ TIMING:</a:t>
+            </a:r>
+          </a:p>
+          <a:p>
+            <a:r>
+              <a:t>15 Minuti</a:t>
+            </a:r>
+          </a:p>
+          <a:p/>
+          <a:p>
+            <a:r>
+              <a:t>📘 GUIDA DOCENTE:</a:t>
             </a:r>
           </a:p>
           <a:p>
@@ -1623,7 +1959,7 @@
           <a:p/>
           <a:p>
             <a:r>
-              <a:t>💡 SUGGERIMENTI DI CONDUZIONE D'AULA:</a:t>
+              <a:t>💻 DEMO / LABORATORIO:</a:t>
             </a:r>
           </a:p>
           <a:p>
@@ -1631,10 +1967,26 @@
               <a:t>Far notare quali prodotti e clienti compaiono più frequentemente nella Top 10.</a:t>
             </a:r>
           </a:p>
+          <a:p>
+            <a:r>
+              <a:t>Esecuzione live della demo a schermo e affiancamento degli studenti nello svolgimento dell'esercitazione associata nel notebook/script di laboratorio.</a:t>
+            </a:r>
+          </a:p>
           <a:p/>
           <a:p>
             <a:r>
-              <a:t>❓ DOMANDE CHIAVE DA PORRE AGLI STUDENTI:</a:t>
+              <a:t>⚠️ ERRORI TIPICI:</a:t>
+            </a:r>
+          </a:p>
+          <a:p>
+            <a:r>
+              <a:t>Confusione sintattica tra formati, mancata gestione delle eccezioni o dimenticanza nell'uso di .copy() sulle viste dei dati.</a:t>
+            </a:r>
+          </a:p>
+          <a:p/>
+          <a:p>
+            <a:r>
+              <a:t>❓ DOMANDE AULA:</a:t>
             </a:r>
           </a:p>
           <a:p>
@@ -1709,13 +2061,29 @@
           <a:lstStyle/>
           <a:p>
             <a:r>
-              <a:t>⏱️ TEMPO STIMATO: 15 Minuti</a:t>
+              <a:t>🎯 OBIETTIVO DIDATTICO:</a:t>
+            </a:r>
+          </a:p>
+          <a:p>
+            <a:r>
+              <a:t>Spiegare la continuità del caso di studio su tutto il percorso formativo.</a:t>
             </a:r>
           </a:p>
           <a:p/>
           <a:p>
             <a:r>
-              <a:t>📘 SPIEGAZIONE PER IL DOCENTE:</a:t>
+              <a:t>⏱️ TIMING:</a:t>
+            </a:r>
+          </a:p>
+          <a:p>
+            <a:r>
+              <a:t>15 Minuti</a:t>
+            </a:r>
+          </a:p>
+          <a:p/>
+          <a:p>
+            <a:r>
+              <a:t>📘 GUIDA DOCENTE:</a:t>
             </a:r>
           </a:p>
           <a:p>
@@ -1726,7 +2094,7 @@
           <a:p/>
           <a:p>
             <a:r>
-              <a:t>💡 SUGGERIMENTI DI CONDUZIONE D'AULA:</a:t>
+              <a:t>💻 DEMO / LABORATORIO:</a:t>
             </a:r>
           </a:p>
           <a:p>
@@ -1734,10 +2102,26 @@
               <a:t>Far notare che non faremo 'esercizi giocattolo', ma lavoreremo su dati aziendali realistici.</a:t>
             </a:r>
           </a:p>
+          <a:p>
+            <a:r>
+              <a:t>Esecuzione live della demo a schermo e affiancamento degli studenti nello svolgimento dell'esercitazione associata nel notebook/script di laboratorio.</a:t>
+            </a:r>
+          </a:p>
           <a:p/>
           <a:p>
             <a:r>
-              <a:t>❓ DOMANDE CHIAVE DA PORRE AGLI STUDENTI:</a:t>
+              <a:t>⚠️ ERRORI TIPICI:</a:t>
+            </a:r>
+          </a:p>
+          <a:p>
+            <a:r>
+              <a:t>Confusione sintattica tra formati, mancata gestione delle eccezioni o dimenticanza nell'uso di .copy() sulle viste dei dati.</a:t>
+            </a:r>
+          </a:p>
+          <a:p/>
+          <a:p>
+            <a:r>
+              <a:t>❓ DOMANDE AULA:</a:t>
             </a:r>
           </a:p>
           <a:p>
@@ -1812,13 +2196,29 @@
           <a:lstStyle/>
           <a:p>
             <a:r>
-              <a:t>⏱️ TEMPO STIMATO: 15 Minuti</a:t>
+              <a:t>🎯 OBIETTIVO DIDATTICO:</a:t>
+            </a:r>
+          </a:p>
+          <a:p>
+            <a:r>
+              <a:t>Spiegare la differenza pratica tra media e mediana nel business.</a:t>
             </a:r>
           </a:p>
           <a:p/>
           <a:p>
             <a:r>
-              <a:t>📘 SPIEGAZIONE PER IL DOCENTE:</a:t>
+              <a:t>⏱️ TIMING:</a:t>
+            </a:r>
+          </a:p>
+          <a:p>
+            <a:r>
+              <a:t>15 Minuti</a:t>
+            </a:r>
+          </a:p>
+          <a:p/>
+          <a:p>
+            <a:r>
+              <a:t>📘 GUIDA DOCENTE:</a:t>
             </a:r>
           </a:p>
           <a:p>
@@ -1829,7 +2229,7 @@
           <a:p/>
           <a:p>
             <a:r>
-              <a:t>💡 SUGGERIMENTI DI CONDUZIONE D'AULA:</a:t>
+              <a:t>💻 DEMO / LABORATORIO:</a:t>
             </a:r>
           </a:p>
           <a:p>
@@ -1837,10 +2237,26 @@
               <a:t>Mostrare perché un ordine enorme sposta la media ma non la mediana.</a:t>
             </a:r>
           </a:p>
+          <a:p>
+            <a:r>
+              <a:t>Esecuzione live della demo a schermo e affiancamento degli studenti nello svolgimento dell'esercitazione associata nel notebook/script di laboratorio.</a:t>
+            </a:r>
+          </a:p>
           <a:p/>
           <a:p>
             <a:r>
-              <a:t>❓ DOMANDE CHIAVE DA PORRE AGLI STUDENTI:</a:t>
+              <a:t>⚠️ ERRORI TIPICI:</a:t>
+            </a:r>
+          </a:p>
+          <a:p>
+            <a:r>
+              <a:t>Confusione sintattica tra formati, mancata gestione delle eccezioni o dimenticanza nell'uso di .copy() sulle viste dei dati.</a:t>
+            </a:r>
+          </a:p>
+          <a:p/>
+          <a:p>
+            <a:r>
+              <a:t>❓ DOMANDE AULA:</a:t>
             </a:r>
           </a:p>
           <a:p>
@@ -1915,13 +2331,29 @@
           <a:lstStyle/>
           <a:p>
             <a:r>
-              <a:t>⏱️ TEMPO STIMATO: 15 Minuti</a:t>
+              <a:t>🎯 OBIETTIVO DIDATTICO:</a:t>
+            </a:r>
+          </a:p>
+          <a:p>
+            <a:r>
+              <a:t>Mostrare la rapidità di calcolo delle quote di mercato interne.</a:t>
             </a:r>
           </a:p>
           <a:p/>
           <a:p>
             <a:r>
-              <a:t>📘 SPIEGAZIONE PER IL DOCENTE:</a:t>
+              <a:t>⏱️ TIMING:</a:t>
+            </a:r>
+          </a:p>
+          <a:p>
+            <a:r>
+              <a:t>15 Minuti</a:t>
+            </a:r>
+          </a:p>
+          <a:p/>
+          <a:p>
+            <a:r>
+              <a:t>📘 GUIDA DOCENTE:</a:t>
             </a:r>
           </a:p>
           <a:p>
@@ -1932,7 +2364,7 @@
           <a:p/>
           <a:p>
             <a:r>
-              <a:t>💡 SUGGERIMENTI DI CONDUZIONE D'AULA:</a:t>
+              <a:t>💻 DEMO / LABORATORIO:</a:t>
             </a:r>
           </a:p>
           <a:p>
@@ -1940,10 +2372,26 @@
               <a:t>Far confrontare i canali digitali rispetto a quelli tradizionali.</a:t>
             </a:r>
           </a:p>
+          <a:p>
+            <a:r>
+              <a:t>Esecuzione live della demo a schermo e affiancamento degli studenti nello svolgimento dell'esercitazione associata nel notebook/script di laboratorio.</a:t>
+            </a:r>
+          </a:p>
           <a:p/>
           <a:p>
             <a:r>
-              <a:t>❓ DOMANDE CHIAVE DA PORRE AGLI STUDENTI:</a:t>
+              <a:t>⚠️ ERRORI TIPICI:</a:t>
+            </a:r>
+          </a:p>
+          <a:p>
+            <a:r>
+              <a:t>Confusione sintattica tra formati, mancata gestione delle eccezioni o dimenticanza nell'uso di .copy() sulle viste dei dati.</a:t>
+            </a:r>
+          </a:p>
+          <a:p/>
+          <a:p>
+            <a:r>
+              <a:t>❓ DOMANDE AULA:</a:t>
             </a:r>
           </a:p>
           <a:p>
@@ -2018,13 +2466,29 @@
           <a:lstStyle/>
           <a:p>
             <a:r>
-              <a:t>⏱️ TEMPO STIMATO: 10 Minuti</a:t>
+              <a:t>🎯 OBIETTIVO DIDATTICO:</a:t>
+            </a:r>
+          </a:p>
+          <a:p>
+            <a:r>
+              <a:t>Consolidare i concetti di Pandas prima di passare alla fase di pulizia pesante.</a:t>
             </a:r>
           </a:p>
           <a:p/>
           <a:p>
             <a:r>
-              <a:t>📘 SPIEGAZIONE PER IL DOCENTE:</a:t>
+              <a:t>⏱️ TIMING:</a:t>
+            </a:r>
+          </a:p>
+          <a:p>
+            <a:r>
+              <a:t>10 Minuti</a:t>
+            </a:r>
+          </a:p>
+          <a:p/>
+          <a:p>
+            <a:r>
+              <a:t>📘 GUIDA DOCENTE:</a:t>
             </a:r>
           </a:p>
           <a:p>
@@ -2035,7 +2499,7 @@
           <a:p/>
           <a:p>
             <a:r>
-              <a:t>💡 SUGGERIMENTI DI CONDUZIONE D'AULA:</a:t>
+              <a:t>💻 DEMO / LABORATORIO:</a:t>
             </a:r>
           </a:p>
           <a:p>
@@ -2043,10 +2507,26 @@
               <a:t>Verificare che tutti abbiano completato il Laboratorio 2.</a:t>
             </a:r>
           </a:p>
+          <a:p>
+            <a:r>
+              <a:t>Esecuzione live della demo a schermo e affiancamento degli studenti nello svolgimento dell'esercitazione associata nel notebook/script di laboratorio.</a:t>
+            </a:r>
+          </a:p>
           <a:p/>
           <a:p>
             <a:r>
-              <a:t>❓ DOMANDE CHIAVE DA PORRE AGLI STUDENTI:</a:t>
+              <a:t>⚠️ ERRORI TIPICI:</a:t>
+            </a:r>
+          </a:p>
+          <a:p>
+            <a:r>
+              <a:t>Confusione sintattica tra formati, mancata gestione delle eccezioni o dimenticanza nell'uso di .copy() sulle viste dei dati.</a:t>
+            </a:r>
+          </a:p>
+          <a:p/>
+          <a:p>
+            <a:r>
+              <a:t>❓ DOMANDE AULA:</a:t>
             </a:r>
           </a:p>
           <a:p>
@@ -2121,13 +2601,29 @@
           <a:lstStyle/>
           <a:p>
             <a:r>
-              <a:t>⏱️ TEMPO STIMATO: 15 Minuti</a:t>
+              <a:t>🎯 OBIETTIVO DIDATTICO:</a:t>
+            </a:r>
+          </a:p>
+          <a:p>
+            <a:r>
+              <a:t>Introdurre il concetto di Data Wrangling: il 70% del tempo di un Data Analyst è dedicato alla pulizia.</a:t>
             </a:r>
           </a:p>
           <a:p/>
           <a:p>
             <a:r>
-              <a:t>📘 SPIEGAZIONE PER IL DOCENTE:</a:t>
+              <a:t>⏱️ TIMING:</a:t>
+            </a:r>
+          </a:p>
+          <a:p>
+            <a:r>
+              <a:t>15 Minuti</a:t>
+            </a:r>
+          </a:p>
+          <a:p/>
+          <a:p>
+            <a:r>
+              <a:t>📘 GUIDA DOCENTE:</a:t>
             </a:r>
           </a:p>
           <a:p>
@@ -2138,7 +2634,7 @@
           <a:p/>
           <a:p>
             <a:r>
-              <a:t>💡 SUGGERIMENTI DI CONDUZIONE D'AULA:</a:t>
+              <a:t>💻 DEMO / LABORATORIO:</a:t>
             </a:r>
           </a:p>
           <a:p>
@@ -2146,10 +2642,26 @@
               <a:t>Mostrare le righe sporche direttamente dal file Excel roma.xlsx.</a:t>
             </a:r>
           </a:p>
+          <a:p>
+            <a:r>
+              <a:t>Esecuzione live della demo a schermo e affiancamento degli studenti nello svolgimento dell'esercitazione associata nel notebook/script di laboratorio.</a:t>
+            </a:r>
+          </a:p>
           <a:p/>
           <a:p>
             <a:r>
-              <a:t>❓ DOMANDE CHIAVE DA PORRE AGLI STUDENTI:</a:t>
+              <a:t>⚠️ ERRORI TIPICI:</a:t>
+            </a:r>
+          </a:p>
+          <a:p>
+            <a:r>
+              <a:t>Confusione sintattica tra formati, mancata gestione delle eccezioni o dimenticanza nell'uso di .copy() sulle viste dei dati.</a:t>
+            </a:r>
+          </a:p>
+          <a:p/>
+          <a:p>
+            <a:r>
+              <a:t>❓ DOMANDE AULA:</a:t>
             </a:r>
           </a:p>
           <a:p>
@@ -2224,13 +2736,29 @@
           <a:lstStyle/>
           <a:p>
             <a:r>
-              <a:t>⏱️ TEMPO STIMATO: 15 Minuti</a:t>
+              <a:t>🎯 OBIETTIVO DIDATTICO:</a:t>
+            </a:r>
+          </a:p>
+          <a:p>
+            <a:r>
+              <a:t>Mostrare la differenza tra duplicato esatto (tutte le colonne uguali) e duplicato su chiave.</a:t>
             </a:r>
           </a:p>
           <a:p/>
           <a:p>
             <a:r>
-              <a:t>📘 SPIEGAZIONE PER IL DOCENTE:</a:t>
+              <a:t>⏱️ TIMING:</a:t>
+            </a:r>
+          </a:p>
+          <a:p>
+            <a:r>
+              <a:t>15 Minuti</a:t>
+            </a:r>
+          </a:p>
+          <a:p/>
+          <a:p>
+            <a:r>
+              <a:t>📘 GUIDA DOCENTE:</a:t>
             </a:r>
           </a:p>
           <a:p>
@@ -2241,7 +2769,7 @@
           <a:p/>
           <a:p>
             <a:r>
-              <a:t>💡 SUGGERIMENTI DI CONDUZIONE D'AULA:</a:t>
+              <a:t>💻 DEMO / LABORATORIO:</a:t>
             </a:r>
           </a:p>
           <a:p>
@@ -2249,10 +2777,26 @@
               <a:t>Far eseguire il comando agli studenti sul file di Roma.</a:t>
             </a:r>
           </a:p>
+          <a:p>
+            <a:r>
+              <a:t>Esecuzione live della demo a schermo e affiancamento degli studenti nello svolgimento dell'esercitazione associata nel notebook/script di laboratorio.</a:t>
+            </a:r>
+          </a:p>
           <a:p/>
           <a:p>
             <a:r>
-              <a:t>❓ DOMANDE CHIAVE DA PORRE AGLI STUDENTI:</a:t>
+              <a:t>⚠️ ERRORI TIPICI:</a:t>
+            </a:r>
+          </a:p>
+          <a:p>
+            <a:r>
+              <a:t>Confusione sintattica tra formati, mancata gestione delle eccezioni o dimenticanza nell'uso di .copy() sulle viste dei dati.</a:t>
+            </a:r>
+          </a:p>
+          <a:p/>
+          <a:p>
+            <a:r>
+              <a:t>❓ DOMANDE AULA:</a:t>
             </a:r>
           </a:p>
           <a:p>
@@ -2327,13 +2871,29 @@
           <a:lstStyle/>
           <a:p>
             <a:r>
-              <a:t>⏱️ TEMPO STIMATO: 15 Minuti</a:t>
+              <a:t>🎯 OBIETTIVO DIDATTICO:</a:t>
+            </a:r>
+          </a:p>
+          <a:p>
+            <a:r>
+              <a:t>Spiegare come le incongruenze di testo creano categorie fittizie nei report se non normalizzate.</a:t>
             </a:r>
           </a:p>
           <a:p/>
           <a:p>
             <a:r>
-              <a:t>📘 SPIEGAZIONE PER IL DOCENTE:</a:t>
+              <a:t>⏱️ TIMING:</a:t>
+            </a:r>
+          </a:p>
+          <a:p>
+            <a:r>
+              <a:t>15 Minuti</a:t>
+            </a:r>
+          </a:p>
+          <a:p/>
+          <a:p>
+            <a:r>
+              <a:t>📘 GUIDA DOCENTE:</a:t>
             </a:r>
           </a:p>
           <a:p>
@@ -2344,7 +2904,7 @@
           <a:p/>
           <a:p>
             <a:r>
-              <a:t>💡 SUGGERIMENTI DI CONDUZIONE D'AULA:</a:t>
+              <a:t>💻 DEMO / LABORATORIO:</a:t>
             </a:r>
           </a:p>
           <a:p>
@@ -2352,10 +2912,26 @@
               <a:t>Mostrare la distribuzione prima e dopo la normalizzazione.</a:t>
             </a:r>
           </a:p>
+          <a:p>
+            <a:r>
+              <a:t>Esecuzione live della demo a schermo e affiancamento degli studenti nello svolgimento dell'esercitazione associata nel notebook/script di laboratorio.</a:t>
+            </a:r>
+          </a:p>
           <a:p/>
           <a:p>
             <a:r>
-              <a:t>❓ DOMANDE CHIAVE DA PORRE AGLI STUDENTI:</a:t>
+              <a:t>⚠️ ERRORI TIPICI:</a:t>
+            </a:r>
+          </a:p>
+          <a:p>
+            <a:r>
+              <a:t>Confusione sintattica tra formati, mancata gestione delle eccezioni o dimenticanza nell'uso di .copy() sulle viste dei dati.</a:t>
+            </a:r>
+          </a:p>
+          <a:p/>
+          <a:p>
+            <a:r>
+              <a:t>❓ DOMANDE AULA:</a:t>
             </a:r>
           </a:p>
           <a:p>
@@ -2430,13 +3006,29 @@
           <a:lstStyle/>
           <a:p>
             <a:r>
-              <a:t>⏱️ TEMPO STIMATO: 15 Minuti</a:t>
+              <a:t>🎯 OBIETTIVO DIDATTICO:</a:t>
+            </a:r>
+          </a:p>
+          <a:p>
+            <a:r>
+              <a:t>Illustrare il funzionamento dei numeri seriali di data di Excel.</a:t>
             </a:r>
           </a:p>
           <a:p/>
           <a:p>
             <a:r>
-              <a:t>📘 SPIEGAZIONE PER IL DOCENTE:</a:t>
+              <a:t>⏱️ TIMING:</a:t>
+            </a:r>
+          </a:p>
+          <a:p>
+            <a:r>
+              <a:t>15 Minuti</a:t>
+            </a:r>
+          </a:p>
+          <a:p/>
+          <a:p>
+            <a:r>
+              <a:t>📘 GUIDA DOCENTE:</a:t>
             </a:r>
           </a:p>
           <a:p>
@@ -2447,7 +3039,7 @@
           <a:p/>
           <a:p>
             <a:r>
-              <a:t>💡 SUGGERIMENTI DI CONDUZIONE D'AULA:</a:t>
+              <a:t>💻 DEMO / LABORATORIO:</a:t>
             </a:r>
           </a:p>
           <a:p>
@@ -2455,10 +3047,26 @@
               <a:t>Far notare il parametro dayfirst=True per evitare inversioni tra giorno e mese.</a:t>
             </a:r>
           </a:p>
+          <a:p>
+            <a:r>
+              <a:t>Esecuzione live della demo a schermo e affiancamento degli studenti nello svolgimento dell'esercitazione associata nel notebook/script di laboratorio.</a:t>
+            </a:r>
+          </a:p>
           <a:p/>
           <a:p>
             <a:r>
-              <a:t>❓ DOMANDE CHIAVE DA PORRE AGLI STUDENTI:</a:t>
+              <a:t>⚠️ ERRORI TIPICI:</a:t>
+            </a:r>
+          </a:p>
+          <a:p>
+            <a:r>
+              <a:t>Confusione sintattica tra formati, mancata gestione delle eccezioni o dimenticanza nell'uso di .copy() sulle viste dei dati.</a:t>
+            </a:r>
+          </a:p>
+          <a:p/>
+          <a:p>
+            <a:r>
+              <a:t>❓ DOMANDE AULA:</a:t>
             </a:r>
           </a:p>
           <a:p>
@@ -2533,13 +3141,29 @@
           <a:lstStyle/>
           <a:p>
             <a:r>
-              <a:t>⏱️ TEMPO STIMATO: 15 Minuti</a:t>
+              <a:t>🎯 OBIETTIVO DIDATTICO:</a:t>
+            </a:r>
+          </a:p>
+          <a:p>
+            <a:r>
+              <a:t>Mostrare come il feature engineering temporale prepari i dati per i grafici di trend e per la dashboard.</a:t>
             </a:r>
           </a:p>
           <a:p/>
           <a:p>
             <a:r>
-              <a:t>📘 SPIEGAZIONE PER IL DOCENTE:</a:t>
+              <a:t>⏱️ TIMING:</a:t>
+            </a:r>
+          </a:p>
+          <a:p>
+            <a:r>
+              <a:t>15 Minuti</a:t>
+            </a:r>
+          </a:p>
+          <a:p/>
+          <a:p>
+            <a:r>
+              <a:t>📘 GUIDA DOCENTE:</a:t>
             </a:r>
           </a:p>
           <a:p>
@@ -2550,7 +3174,7 @@
           <a:p/>
           <a:p>
             <a:r>
-              <a:t>💡 SUGGERIMENTI DI CONDUZIONE D'AULA:</a:t>
+              <a:t>💻 DEMO / LABORATORIO:</a:t>
             </a:r>
           </a:p>
           <a:p>
@@ -2558,10 +3182,26 @@
               <a:t>Spiegare la comodità dell'accessore .dt.</a:t>
             </a:r>
           </a:p>
+          <a:p>
+            <a:r>
+              <a:t>Esecuzione live della demo a schermo e affiancamento degli studenti nello svolgimento dell'esercitazione associata nel notebook/script di laboratorio.</a:t>
+            </a:r>
+          </a:p>
           <a:p/>
           <a:p>
             <a:r>
-              <a:t>❓ DOMANDE CHIAVE DA PORRE AGLI STUDENTI:</a:t>
+              <a:t>⚠️ ERRORI TIPICI:</a:t>
+            </a:r>
+          </a:p>
+          <a:p>
+            <a:r>
+              <a:t>Confusione sintattica tra formati, mancata gestione delle eccezioni o dimenticanza nell'uso di .copy() sulle viste dei dati.</a:t>
+            </a:r>
+          </a:p>
+          <a:p/>
+          <a:p>
+            <a:r>
+              <a:t>❓ DOMANDE AULA:</a:t>
             </a:r>
           </a:p>
           <a:p>
@@ -2636,13 +3276,29 @@
           <a:lstStyle/>
           <a:p>
             <a:r>
-              <a:t>⏱️ TEMPO STIMATO: 15 Minuti</a:t>
+              <a:t>🎯 OBIETTIVO DIDATTICO:</a:t>
+            </a:r>
+          </a:p>
+          <a:p>
+            <a:r>
+              <a:t>Evidenziare la differenza fondamentale tra media globale ed imputazione per gruppo.</a:t>
             </a:r>
           </a:p>
           <a:p/>
           <a:p>
             <a:r>
-              <a:t>📘 SPIEGAZIONE PER IL DOCENTE:</a:t>
+              <a:t>⏱️ TIMING:</a:t>
+            </a:r>
+          </a:p>
+          <a:p>
+            <a:r>
+              <a:t>15 Minuti</a:t>
+            </a:r>
+          </a:p>
+          <a:p/>
+          <a:p>
+            <a:r>
+              <a:t>📘 GUIDA DOCENTE:</a:t>
             </a:r>
           </a:p>
           <a:p>
@@ -2653,7 +3309,7 @@
           <a:p/>
           <a:p>
             <a:r>
-              <a:t>💡 SUGGERIMENTI DI CONDUZIONE D'AULA:</a:t>
+              <a:t>💻 DEMO / LABORATORIO:</a:t>
             </a:r>
           </a:p>
           <a:p>
@@ -2661,10 +3317,26 @@
               <a:t>Mostrare come transform() mantenga la stessa lunghezza del DataFrame originale.</a:t>
             </a:r>
           </a:p>
+          <a:p>
+            <a:r>
+              <a:t>Esecuzione live della demo a schermo e affiancamento degli studenti nello svolgimento dell'esercitazione associata nel notebook/script di laboratorio.</a:t>
+            </a:r>
+          </a:p>
           <a:p/>
           <a:p>
             <a:r>
-              <a:t>❓ DOMANDE CHIAVE DA PORRE AGLI STUDENTI:</a:t>
+              <a:t>⚠️ ERRORI TIPICI:</a:t>
+            </a:r>
+          </a:p>
+          <a:p>
+            <a:r>
+              <a:t>Confusione sintattica tra formati, mancata gestione delle eccezioni o dimenticanza nell'uso di .copy() sulle viste dei dati.</a:t>
+            </a:r>
+          </a:p>
+          <a:p/>
+          <a:p>
+            <a:r>
+              <a:t>❓ DOMANDE AULA:</a:t>
             </a:r>
           </a:p>
           <a:p>
@@ -2739,13 +3411,29 @@
           <a:lstStyle/>
           <a:p>
             <a:r>
-              <a:t>⏱️ TEMPO STIMATO: 15 Minuti</a:t>
+              <a:t>🎯 OBIETTIVO DIDATTICO:</a:t>
+            </a:r>
+          </a:p>
+          <a:p>
+            <a:r>
+              <a:t>Spiegare la Left Join come analogo moderno e robusto del CERCA.</a:t>
             </a:r>
           </a:p>
           <a:p/>
           <a:p>
             <a:r>
-              <a:t>📘 SPIEGAZIONE PER IL DOCENTE:</a:t>
+              <a:t>⏱️ TIMING:</a:t>
+            </a:r>
+          </a:p>
+          <a:p>
+            <a:r>
+              <a:t>15 Minuti</a:t>
+            </a:r>
+          </a:p>
+          <a:p/>
+          <a:p>
+            <a:r>
+              <a:t>📘 GUIDA DOCENTE:</a:t>
             </a:r>
           </a:p>
           <a:p>
@@ -2756,7 +3444,7 @@
           <a:p/>
           <a:p>
             <a:r>
-              <a:t>💡 SUGGERIMENTI DI CONDUZIONE D'AULA:</a:t>
+              <a:t>💻 DEMO / LABORATORIO:</a:t>
             </a:r>
           </a:p>
           <a:p>
@@ -2764,10 +3452,26 @@
               <a:t>Far notare che la merge in Pandas non soffre dei limiti di ordinamento o posizione delle colonne.</a:t>
             </a:r>
           </a:p>
+          <a:p>
+            <a:r>
+              <a:t>Esecuzione live della demo a schermo e affiancamento degli studenti nello svolgimento dell'esercitazione associata nel notebook/script di laboratorio.</a:t>
+            </a:r>
+          </a:p>
           <a:p/>
           <a:p>
             <a:r>
-              <a:t>❓ DOMANDE CHIAVE DA PORRE AGLI STUDENTI:</a:t>
+              <a:t>⚠️ ERRORI TIPICI:</a:t>
+            </a:r>
+          </a:p>
+          <a:p>
+            <a:r>
+              <a:t>Confusione sintattica tra formati, mancata gestione delle eccezioni o dimenticanza nell'uso di .copy() sulle viste dei dati.</a:t>
+            </a:r>
+          </a:p>
+          <a:p/>
+          <a:p>
+            <a:r>
+              <a:t>❓ DOMANDE AULA:</a:t>
             </a:r>
           </a:p>
           <a:p>
@@ -2842,13 +3546,29 @@
           <a:lstStyle/>
           <a:p>
             <a:r>
-              <a:t>⏱️ TEMPO STIMATO: 15 Minuti</a:t>
+              <a:t>🎯 OBIETTIVO DIDATTICO:</a:t>
+            </a:r>
+          </a:p>
+          <a:p>
+            <a:r>
+              <a:t>Spiegare perché il casting fallisce sui dati reali italiani (virgola decimale vs punto).</a:t>
             </a:r>
           </a:p>
           <a:p/>
           <a:p>
             <a:r>
-              <a:t>📘 SPIEGAZIONE PER IL DOCENTE:</a:t>
+              <a:t>⏱️ TIMING:</a:t>
+            </a:r>
+          </a:p>
+          <a:p>
+            <a:r>
+              <a:t>15 Minuti</a:t>
+            </a:r>
+          </a:p>
+          <a:p/>
+          <a:p>
+            <a:r>
+              <a:t>📘 GUIDA DOCENTE:</a:t>
             </a:r>
           </a:p>
           <a:p>
@@ -2859,7 +3579,7 @@
           <a:p/>
           <a:p>
             <a:r>
-              <a:t>💡 SUGGERIMENTI DI CONDUZIONE D'AULA:</a:t>
+              <a:t>💻 DEMO / LABORATORIO:</a:t>
             </a:r>
           </a:p>
           <a:p>
@@ -2867,10 +3587,26 @@
               <a:t>Aprire il REPL Python interattivo e mostrare in diretta il ValueError lanciato da float('100,50').</a:t>
             </a:r>
           </a:p>
+          <a:p>
+            <a:r>
+              <a:t>Esecuzione live della demo a schermo e affiancamento degli studenti nello svolgimento dell'esercitazione associata nel notebook/script di laboratorio.</a:t>
+            </a:r>
+          </a:p>
           <a:p/>
           <a:p>
             <a:r>
-              <a:t>❓ DOMANDE CHIAVE DA PORRE AGLI STUDENTI:</a:t>
+              <a:t>⚠️ ERRORI TIPICI:</a:t>
+            </a:r>
+          </a:p>
+          <a:p>
+            <a:r>
+              <a:t>Confusione sintattica tra formati, mancata gestione delle eccezioni o dimenticanza nell'uso di .copy() sulle viste dei dati.</a:t>
+            </a:r>
+          </a:p>
+          <a:p/>
+          <a:p>
+            <a:r>
+              <a:t>❓ DOMANDE AULA:</a:t>
             </a:r>
           </a:p>
           <a:p>
@@ -2945,13 +3681,29 @@
           <a:lstStyle/>
           <a:p>
             <a:r>
-              <a:t>⏱️ TEMPO STIMATO: 15 Minuti</a:t>
+              <a:t>🎯 OBIETTIVO DIDATTICO:</a:t>
+            </a:r>
+          </a:p>
+          <a:p>
+            <a:r>
+              <a:t>Far eseguire il merge e verificare che il conteggio righe sia rimasto esattamente a 1.</a:t>
             </a:r>
           </a:p>
           <a:p/>
           <a:p>
             <a:r>
-              <a:t>📘 SPIEGAZIONE PER IL DOCENTE:</a:t>
+              <a:t>⏱️ TIMING:</a:t>
+            </a:r>
+          </a:p>
+          <a:p>
+            <a:r>
+              <a:t>15 Minuti</a:t>
+            </a:r>
+          </a:p>
+          <a:p/>
+          <a:p>
+            <a:r>
+              <a:t>📘 GUIDA DOCENTE:</a:t>
             </a:r>
           </a:p>
           <a:p>
@@ -2962,7 +3714,7 @@
           <a:p/>
           <a:p>
             <a:r>
-              <a:t>💡 SUGGERIMENTI DI CONDUZIONE D'AULA:</a:t>
+              <a:t>💻 DEMO / LABORATORIO:</a:t>
             </a:r>
           </a:p>
           <a:p>
@@ -2970,10 +3722,26 @@
               <a:t>Mostrare come le colonne Settore e Rating_Affidabilita siano ora disponibili per l'analisi.</a:t>
             </a:r>
           </a:p>
+          <a:p>
+            <a:r>
+              <a:t>Esecuzione live della demo a schermo e affiancamento degli studenti nello svolgimento dell'esercitazione associata nel notebook/script di laboratorio.</a:t>
+            </a:r>
+          </a:p>
           <a:p/>
           <a:p>
             <a:r>
-              <a:t>❓ DOMANDE CHIAVE DA PORRE AGLI STUDENTI:</a:t>
+              <a:t>⚠️ ERRORI TIPICI:</a:t>
+            </a:r>
+          </a:p>
+          <a:p>
+            <a:r>
+              <a:t>Confusione sintattica tra formati, mancata gestione delle eccezioni o dimenticanza nell'uso di .copy() sulle viste dei dati.</a:t>
+            </a:r>
+          </a:p>
+          <a:p/>
+          <a:p>
+            <a:r>
+              <a:t>❓ DOMANDE AULA:</a:t>
             </a:r>
           </a:p>
           <a:p>
@@ -3048,13 +3816,29 @@
           <a:lstStyle/>
           <a:p>
             <a:r>
-              <a:t>⏱️ TEMPO STIMATO: 15 Minuti</a:t>
+              <a:t>🎯 OBIETTIVO DIDATTICO:</a:t>
+            </a:r>
+          </a:p>
+          <a:p>
+            <a:r>
+              <a:t>Spiegare la Named Aggregation come standard moderno per creare report puliti.</a:t>
             </a:r>
           </a:p>
           <a:p/>
           <a:p>
             <a:r>
-              <a:t>📘 SPIEGAZIONE PER IL DOCENTE:</a:t>
+              <a:t>⏱️ TIMING:</a:t>
+            </a:r>
+          </a:p>
+          <a:p>
+            <a:r>
+              <a:t>15 Minuti</a:t>
+            </a:r>
+          </a:p>
+          <a:p/>
+          <a:p>
+            <a:r>
+              <a:t>📘 GUIDA DOCENTE:</a:t>
             </a:r>
           </a:p>
           <a:p>
@@ -3065,7 +3849,7 @@
           <a:p/>
           <a:p>
             <a:r>
-              <a:t>💡 SUGGERIMENTI DI CONDUZIONE D'AULA:</a:t>
+              <a:t>💻 DEMO / LABORATORIO:</a:t>
             </a:r>
           </a:p>
           <a:p>
@@ -3073,10 +3857,26 @@
               <a:t>Mostrare come ordinare il report per fatturato decrescente.</a:t>
             </a:r>
           </a:p>
+          <a:p>
+            <a:r>
+              <a:t>Esecuzione live della demo a schermo e affiancamento degli studenti nello svolgimento dell'esercitazione associata nel notebook/script di laboratorio.</a:t>
+            </a:r>
+          </a:p>
           <a:p/>
           <a:p>
             <a:r>
-              <a:t>❓ DOMANDE CHIAVE DA PORRE AGLI STUDENTI:</a:t>
+              <a:t>⚠️ ERRORI TIPICI:</a:t>
+            </a:r>
+          </a:p>
+          <a:p>
+            <a:r>
+              <a:t>Confusione sintattica tra formati, mancata gestione delle eccezioni o dimenticanza nell'uso di .copy() sulle viste dei dati.</a:t>
+            </a:r>
+          </a:p>
+          <a:p/>
+          <a:p>
+            <a:r>
+              <a:t>❓ DOMANDE AULA:</a:t>
             </a:r>
           </a:p>
           <a:p>
@@ -3151,13 +3951,29 @@
           <a:lstStyle/>
           <a:p>
             <a:r>
-              <a:t>⏱️ TEMPO STIMATO: 45 Minuti</a:t>
+              <a:t>🎯 OBIETTIVO DIDATTICO:</a:t>
+            </a:r>
+          </a:p>
+          <a:p>
+            <a:r>
+              <a:t>Guidare gli studenti nella risoluzione del laboratorio.</a:t>
             </a:r>
           </a:p>
           <a:p/>
           <a:p>
             <a:r>
-              <a:t>📘 SPIEGAZIONE PER IL DOCENTE:</a:t>
+              <a:t>⏱️ TIMING:</a:t>
+            </a:r>
+          </a:p>
+          <a:p>
+            <a:r>
+              <a:t>45 Minuti</a:t>
+            </a:r>
+          </a:p>
+          <a:p/>
+          <a:p>
+            <a:r>
+              <a:t>📘 GUIDA DOCENTE:</a:t>
             </a:r>
           </a:p>
           <a:p>
@@ -3168,7 +3984,7 @@
           <a:p/>
           <a:p>
             <a:r>
-              <a:t>💡 SUGGERIMENTI DI CONDUZIONE D'AULA:</a:t>
+              <a:t>💻 DEMO / LABORATORIO:</a:t>
             </a:r>
           </a:p>
           <a:p>
@@ -3176,10 +3992,26 @@
               <a:t>Verificare che i totali coincidano al centesimo con la soluzione.</a:t>
             </a:r>
           </a:p>
+          <a:p>
+            <a:r>
+              <a:t>Esecuzione live della demo a schermo e affiancamento degli studenti nello svolgimento dell'esercitazione associata nel notebook/script di laboratorio.</a:t>
+            </a:r>
+          </a:p>
           <a:p/>
           <a:p>
             <a:r>
-              <a:t>❓ DOMANDE CHIAVE DA PORRE AGLI STUDENTI:</a:t>
+              <a:t>⚠️ ERRORI TIPICI:</a:t>
+            </a:r>
+          </a:p>
+          <a:p>
+            <a:r>
+              <a:t>Confusione sintattica tra formati, mancata gestione delle eccezioni o dimenticanza nell'uso di .copy() sulle viste dei dati.</a:t>
+            </a:r>
+          </a:p>
+          <a:p/>
+          <a:p>
+            <a:r>
+              <a:t>❓ DOMANDE AULA:</a:t>
             </a:r>
           </a:p>
           <a:p>
@@ -3254,13 +4086,29 @@
           <a:lstStyle/>
           <a:p>
             <a:r>
-              <a:t>⏱️ TEMPO STIMATO: 15 Minuti</a:t>
+              <a:t>🎯 OBIETTIVO DIDATTICO:</a:t>
+            </a:r>
+          </a:p>
+          <a:p>
+            <a:r>
+              <a:t>Confrontare la pivot_table di Pandas con le tabelle pivot di Excel.</a:t>
             </a:r>
           </a:p>
           <a:p/>
           <a:p>
             <a:r>
-              <a:t>📘 SPIEGAZIONE PER IL DOCENTE:</a:t>
+              <a:t>⏱️ TIMING:</a:t>
+            </a:r>
+          </a:p>
+          <a:p>
+            <a:r>
+              <a:t>15 Minuti</a:t>
+            </a:r>
+          </a:p>
+          <a:p/>
+          <a:p>
+            <a:r>
+              <a:t>📘 GUIDA DOCENTE:</a:t>
             </a:r>
           </a:p>
           <a:p>
@@ -3271,7 +4119,7 @@
           <a:p/>
           <a:p>
             <a:r>
-              <a:t>💡 SUGGERIMENTI DI CONDUZIONE D'AULA:</a:t>
+              <a:t>💻 DEMO / LABORATORIO:</a:t>
             </a:r>
           </a:p>
           <a:p>
@@ -3279,10 +4127,26 @@
               <a:t>Mostrare come questa matrice sia la base diretta per generare la Heatmap nel Modulo 4.</a:t>
             </a:r>
           </a:p>
+          <a:p>
+            <a:r>
+              <a:t>Esecuzione live della demo a schermo e affiancamento degli studenti nello svolgimento dell'esercitazione associata nel notebook/script di laboratorio.</a:t>
+            </a:r>
+          </a:p>
           <a:p/>
           <a:p>
             <a:r>
-              <a:t>❓ DOMANDE CHIAVE DA PORRE AGLI STUDENTI:</a:t>
+              <a:t>⚠️ ERRORI TIPICI:</a:t>
+            </a:r>
+          </a:p>
+          <a:p>
+            <a:r>
+              <a:t>Confusione sintattica tra formati, mancata gestione delle eccezioni o dimenticanza nell'uso di .copy() sulle viste dei dati.</a:t>
+            </a:r>
+          </a:p>
+          <a:p/>
+          <a:p>
+            <a:r>
+              <a:t>❓ DOMANDE AULA:</a:t>
             </a:r>
           </a:p>
           <a:p>
@@ -3357,13 +4221,29 @@
           <a:lstStyle/>
           <a:p>
             <a:r>
-              <a:t>⏱️ TEMPO STIMATO: 10 Minuti</a:t>
+              <a:t>🎯 OBIETTIVO DIDATTICO:</a:t>
+            </a:r>
+          </a:p>
+          <a:p>
+            <a:r>
+              <a:t>Punto di svolta del corso: i dati sono finalmente puliti e pronti per il business.</a:t>
             </a:r>
           </a:p>
           <a:p/>
           <a:p>
             <a:r>
-              <a:t>📘 SPIEGAZIONE PER IL DOCENTE:</a:t>
+              <a:t>⏱️ TIMING:</a:t>
+            </a:r>
+          </a:p>
+          <a:p>
+            <a:r>
+              <a:t>10 Minuti</a:t>
+            </a:r>
+          </a:p>
+          <a:p/>
+          <a:p>
+            <a:r>
+              <a:t>📘 GUIDA DOCENTE:</a:t>
             </a:r>
           </a:p>
           <a:p>
@@ -3374,7 +4254,7 @@
           <a:p/>
           <a:p>
             <a:r>
-              <a:t>💡 SUGGERIMENTI DI CONDUZIONE D'AULA:</a:t>
+              <a:t>💻 DEMO / LABORATORIO:</a:t>
             </a:r>
           </a:p>
           <a:p>
@@ -3382,10 +4262,26 @@
               <a:t>Congratularsi con l'aula per aver completato la parte più ostica (il data cleaning).</a:t>
             </a:r>
           </a:p>
+          <a:p>
+            <a:r>
+              <a:t>Esecuzione live della demo a schermo e affiancamento degli studenti nello svolgimento dell'esercitazione associata nel notebook/script di laboratorio.</a:t>
+            </a:r>
+          </a:p>
           <a:p/>
           <a:p>
             <a:r>
-              <a:t>❓ DOMANDE CHIAVE DA PORRE AGLI STUDENTI:</a:t>
+              <a:t>⚠️ ERRORI TIPICI:</a:t>
+            </a:r>
+          </a:p>
+          <a:p>
+            <a:r>
+              <a:t>Confusione sintattica tra formati, mancata gestione delle eccezioni o dimenticanza nell'uso di .copy() sulle viste dei dati.</a:t>
+            </a:r>
+          </a:p>
+          <a:p/>
+          <a:p>
+            <a:r>
+              <a:t>❓ DOMANDE AULA:</a:t>
             </a:r>
           </a:p>
           <a:p>
@@ -3460,13 +4356,29 @@
           <a:lstStyle/>
           <a:p>
             <a:r>
-              <a:t>⏱️ TEMPO STIMATO: 15 Minuti</a:t>
+              <a:t>🎯 OBIETTIVO DIDATTICO:</a:t>
+            </a:r>
+          </a:p>
+          <a:p>
+            <a:r>
+              <a:t>Spiegare la psicologia della percezione visiva nei report direzionali.</a:t>
             </a:r>
           </a:p>
           <a:p/>
           <a:p>
             <a:r>
-              <a:t>📘 SPIEGAZIONE PER IL DOCENTE:</a:t>
+              <a:t>⏱️ TIMING:</a:t>
+            </a:r>
+          </a:p>
+          <a:p>
+            <a:r>
+              <a:t>15 Minuti</a:t>
+            </a:r>
+          </a:p>
+          <a:p/>
+          <a:p>
+            <a:r>
+              <a:t>📘 GUIDA DOCENTE:</a:t>
             </a:r>
           </a:p>
           <a:p>
@@ -3477,7 +4389,7 @@
           <a:p/>
           <a:p>
             <a:r>
-              <a:t>💡 SUGGERIMENTI DI CONDUZIONE D'AULA:</a:t>
+              <a:t>💻 DEMO / LABORATORIO:</a:t>
             </a:r>
           </a:p>
           <a:p>
@@ -3485,10 +4397,26 @@
               <a:t>Mostrare l'anteprima della Executive Dashboard 2x2 che realizzeremo nel modulo.</a:t>
             </a:r>
           </a:p>
+          <a:p>
+            <a:r>
+              <a:t>Esecuzione live della demo a schermo e affiancamento degli studenti nello svolgimento dell'esercitazione associata nel notebook/script di laboratorio.</a:t>
+            </a:r>
+          </a:p>
           <a:p/>
           <a:p>
             <a:r>
-              <a:t>❓ DOMANDE CHIAVE DA PORRE AGLI STUDENTI:</a:t>
+              <a:t>⚠️ ERRORI TIPICI:</a:t>
+            </a:r>
+          </a:p>
+          <a:p>
+            <a:r>
+              <a:t>Confusione sintattica tra formati, mancata gestione delle eccezioni o dimenticanza nell'uso di .copy() sulle viste dei dati.</a:t>
+            </a:r>
+          </a:p>
+          <a:p/>
+          <a:p>
+            <a:r>
+              <a:t>❓ DOMANDE AULA:</a:t>
             </a:r>
           </a:p>
           <a:p>
@@ -3563,13 +4491,29 @@
           <a:lstStyle/>
           <a:p>
             <a:r>
-              <a:t>⏱️ TEMPO STIMATO: 15 Minuti</a:t>
+              <a:t>🎯 OBIETTIVO DIDATTICO:</a:t>
+            </a:r>
+          </a:p>
+          <a:p>
+            <a:r>
+              <a:t>Spiegare la differenza tra l'approccio orientato a oggetti (fig, ax) e l'approccio procedurale (plt.</a:t>
             </a:r>
           </a:p>
           <a:p/>
           <a:p>
             <a:r>
-              <a:t>📘 SPIEGAZIONE PER IL DOCENTE:</a:t>
+              <a:t>⏱️ TIMING:</a:t>
+            </a:r>
+          </a:p>
+          <a:p>
+            <a:r>
+              <a:t>15 Minuti</a:t>
+            </a:r>
+          </a:p>
+          <a:p/>
+          <a:p>
+            <a:r>
+              <a:t>📘 GUIDA DOCENTE:</a:t>
             </a:r>
           </a:p>
           <a:p>
@@ -3580,7 +4524,7 @@
           <a:p/>
           <a:p>
             <a:r>
-              <a:t>💡 SUGGERIMENTI DI CONDUZIONE D'AULA:</a:t>
+              <a:t>💻 DEMO / LABORATORIO:</a:t>
             </a:r>
           </a:p>
           <a:p>
@@ -3588,10 +4532,26 @@
               <a:t>Insegnare l'uso di tight_layout() per evitare testi tagliati.</a:t>
             </a:r>
           </a:p>
+          <a:p>
+            <a:r>
+              <a:t>Esecuzione live della demo a schermo e affiancamento degli studenti nello svolgimento dell'esercitazione associata nel notebook/script di laboratorio.</a:t>
+            </a:r>
+          </a:p>
           <a:p/>
           <a:p>
             <a:r>
-              <a:t>❓ DOMANDE CHIAVE DA PORRE AGLI STUDENTI:</a:t>
+              <a:t>⚠️ ERRORI TIPICI:</a:t>
+            </a:r>
+          </a:p>
+          <a:p>
+            <a:r>
+              <a:t>Confusione sintattica tra formati, mancata gestione delle eccezioni o dimenticanza nell'uso di .copy() sulle viste dei dati.</a:t>
+            </a:r>
+          </a:p>
+          <a:p/>
+          <a:p>
+            <a:r>
+              <a:t>❓ DOMANDE AULA:</a:t>
             </a:r>
           </a:p>
           <a:p>
@@ -3666,13 +4626,29 @@
           <a:lstStyle/>
           <a:p>
             <a:r>
-              <a:t>⏱️ TEMPO STIMATO: 15 Minuti</a:t>
+              <a:t>🎯 OBIETTIVO DIDATTICO:</a:t>
+            </a:r>
+          </a:p>
+          <a:p>
+            <a:r>
+              <a:t>Spiegare perché il grafico a barre orizzontale è la scelta migliore quando le etichette di testo sono lunghe.</a:t>
             </a:r>
           </a:p>
           <a:p/>
           <a:p>
             <a:r>
-              <a:t>📘 SPIEGAZIONE PER IL DOCENTE:</a:t>
+              <a:t>⏱️ TIMING:</a:t>
+            </a:r>
+          </a:p>
+          <a:p>
+            <a:r>
+              <a:t>15 Minuti</a:t>
+            </a:r>
+          </a:p>
+          <a:p/>
+          <a:p>
+            <a:r>
+              <a:t>📘 GUIDA DOCENTE:</a:t>
             </a:r>
           </a:p>
           <a:p>
@@ -3683,7 +4659,7 @@
           <a:p/>
           <a:p>
             <a:r>
-              <a:t>💡 SUGGERIMENTI DI CONDUZIONE D'AULA:</a:t>
+              <a:t>💻 DEMO / LABORATORIO:</a:t>
             </a:r>
           </a:p>
           <a:p>
@@ -3691,10 +4667,26 @@
               <a:t>Mostrare come inserire le label di testo sui dati con ax.text().</a:t>
             </a:r>
           </a:p>
+          <a:p>
+            <a:r>
+              <a:t>Esecuzione live della demo a schermo e affiancamento degli studenti nello svolgimento dell'esercitazione associata nel notebook/script di laboratorio.</a:t>
+            </a:r>
+          </a:p>
           <a:p/>
           <a:p>
             <a:r>
-              <a:t>❓ DOMANDE CHIAVE DA PORRE AGLI STUDENTI:</a:t>
+              <a:t>⚠️ ERRORI TIPICI:</a:t>
+            </a:r>
+          </a:p>
+          <a:p>
+            <a:r>
+              <a:t>Confusione sintattica tra formati, mancata gestione delle eccezioni o dimenticanza nell'uso di .copy() sulle viste dei dati.</a:t>
+            </a:r>
+          </a:p>
+          <a:p/>
+          <a:p>
+            <a:r>
+              <a:t>❓ DOMANDE AULA:</a:t>
             </a:r>
           </a:p>
           <a:p>
@@ -3769,13 +4761,29 @@
           <a:lstStyle/>
           <a:p>
             <a:r>
-              <a:t>⏱️ TEMPO STIMATO: 15 Minuti</a:t>
+              <a:t>🎯 OBIETTIVO DIDATTICO:</a:t>
+            </a:r>
+          </a:p>
+          <a:p>
+            <a:r>
+              <a:t>Mostrare come una linea orizzontale di media o budget fornisca contesto immediato al lettore.</a:t>
             </a:r>
           </a:p>
           <a:p/>
           <a:p>
             <a:r>
-              <a:t>📘 SPIEGAZIONE PER IL DOCENTE:</a:t>
+              <a:t>⏱️ TIMING:</a:t>
+            </a:r>
+          </a:p>
+          <a:p>
+            <a:r>
+              <a:t>15 Minuti</a:t>
+            </a:r>
+          </a:p>
+          <a:p/>
+          <a:p>
+            <a:r>
+              <a:t>📘 GUIDA DOCENTE:</a:t>
             </a:r>
           </a:p>
           <a:p>
@@ -3786,7 +4794,7 @@
           <a:p/>
           <a:p>
             <a:r>
-              <a:t>💡 SUGGERIMENTI DI CONDUZIONE D'AULA:</a:t>
+              <a:t>💻 DEMO / LABORATORIO:</a:t>
             </a:r>
           </a:p>
           <a:p>
@@ -3794,10 +4802,26 @@
               <a:t>Far notare i picchi di vendita stagionali.</a:t>
             </a:r>
           </a:p>
+          <a:p>
+            <a:r>
+              <a:t>Esecuzione live della demo a schermo e affiancamento degli studenti nello svolgimento dell'esercitazione associata nel notebook/script di laboratorio.</a:t>
+            </a:r>
+          </a:p>
           <a:p/>
           <a:p>
             <a:r>
-              <a:t>❓ DOMANDE CHIAVE DA PORRE AGLI STUDENTI:</a:t>
+              <a:t>⚠️ ERRORI TIPICI:</a:t>
+            </a:r>
+          </a:p>
+          <a:p>
+            <a:r>
+              <a:t>Confusione sintattica tra formati, mancata gestione delle eccezioni o dimenticanza nell'uso di .copy() sulle viste dei dati.</a:t>
+            </a:r>
+          </a:p>
+          <a:p/>
+          <a:p>
+            <a:r>
+              <a:t>❓ DOMANDE AULA:</a:t>
             </a:r>
           </a:p>
           <a:p>
@@ -3872,13 +4896,29 @@
           <a:lstStyle/>
           <a:p>
             <a:r>
-              <a:t>⏱️ TEMPO STIMATO: 15 Minuti</a:t>
+              <a:t>🎯 OBIETTIVO DIDATTICO:</a:t>
+            </a:r>
+          </a:p>
+          <a:p>
+            <a:r>
+              <a:t>Illustrare come Seaborn semplifichi grafici statistici complessi in poche righe di codice.</a:t>
             </a:r>
           </a:p>
           <a:p/>
           <a:p>
             <a:r>
-              <a:t>📘 SPIEGAZIONE PER IL DOCENTE:</a:t>
+              <a:t>⏱️ TIMING:</a:t>
+            </a:r>
+          </a:p>
+          <a:p>
+            <a:r>
+              <a:t>15 Minuti</a:t>
+            </a:r>
+          </a:p>
+          <a:p/>
+          <a:p>
+            <a:r>
+              <a:t>📘 GUIDA DOCENTE:</a:t>
             </a:r>
           </a:p>
           <a:p>
@@ -3889,7 +4929,7 @@
           <a:p/>
           <a:p>
             <a:r>
-              <a:t>💡 SUGGERIMENTI DI CONDUZIONE D'AULA:</a:t>
+              <a:t>💻 DEMO / LABORATORIO:</a:t>
             </a:r>
           </a:p>
           <a:p>
@@ -3897,10 +4937,26 @@
               <a:t>Mostrare come il parametro hue suddivida automaticamente i dati per canale.</a:t>
             </a:r>
           </a:p>
+          <a:p>
+            <a:r>
+              <a:t>Esecuzione live della demo a schermo e affiancamento degli studenti nello svolgimento dell'esercitazione associata nel notebook/script di laboratorio.</a:t>
+            </a:r>
+          </a:p>
           <a:p/>
           <a:p>
             <a:r>
-              <a:t>❓ DOMANDE CHIAVE DA PORRE AGLI STUDENTI:</a:t>
+              <a:t>⚠️ ERRORI TIPICI:</a:t>
+            </a:r>
+          </a:p>
+          <a:p>
+            <a:r>
+              <a:t>Confusione sintattica tra formati, mancata gestione delle eccezioni o dimenticanza nell'uso di .copy() sulle viste dei dati.</a:t>
+            </a:r>
+          </a:p>
+          <a:p/>
+          <a:p>
+            <a:r>
+              <a:t>❓ DOMANDE AULA:</a:t>
             </a:r>
           </a:p>
           <a:p>
@@ -3975,13 +5031,29 @@
           <a:lstStyle/>
           <a:p>
             <a:r>
-              <a:t>⏱️ TEMPO STIMATO: 15 Minuti</a:t>
+              <a:t>🎯 OBIETTIVO DIDATTICO:</a:t>
+            </a:r>
+          </a:p>
+          <a:p>
+            <a:r>
+              <a:t>Mostrare la corrispondenza 1:1 tra un record di database/Excel e un dizionario Python.</a:t>
             </a:r>
           </a:p>
           <a:p/>
           <a:p>
             <a:r>
-              <a:t>📘 SPIEGAZIONE PER IL DOCENTE:</a:t>
+              <a:t>⏱️ TIMING:</a:t>
+            </a:r>
+          </a:p>
+          <a:p>
+            <a:r>
+              <a:t>15 Minuti</a:t>
+            </a:r>
+          </a:p>
+          <a:p/>
+          <a:p>
+            <a:r>
+              <a:t>📘 GUIDA DOCENTE:</a:t>
             </a:r>
           </a:p>
           <a:p>
@@ -3992,7 +5064,7 @@
           <a:p/>
           <a:p>
             <a:r>
-              <a:t>💡 SUGGERIMENTI DI CONDUZIONE D'AULA:</a:t>
+              <a:t>💻 DEMO / LABORATORIO:</a:t>
             </a:r>
           </a:p>
           <a:p>
@@ -4000,10 +5072,26 @@
               <a:t>Far vedere la differenza tra ordine['note'] (errore) e ordine.get('note') (sicuro).</a:t>
             </a:r>
           </a:p>
+          <a:p>
+            <a:r>
+              <a:t>Esecuzione live della demo a schermo e affiancamento degli studenti nello svolgimento dell'esercitazione associata nel notebook/script di laboratorio.</a:t>
+            </a:r>
+          </a:p>
           <a:p/>
           <a:p>
             <a:r>
-              <a:t>❓ DOMANDE CHIAVE DA PORRE AGLI STUDENTI:</a:t>
+              <a:t>⚠️ ERRORI TIPICI:</a:t>
+            </a:r>
+          </a:p>
+          <a:p>
+            <a:r>
+              <a:t>Confusione sintattica tra formati, mancata gestione delle eccezioni o dimenticanza nell'uso di .copy() sulle viste dei dati.</a:t>
+            </a:r>
+          </a:p>
+          <a:p/>
+          <a:p>
+            <a:r>
+              <a:t>❓ DOMANDE AULA:</a:t>
             </a:r>
           </a:p>
           <a:p>
@@ -4078,13 +5166,29 @@
           <a:lstStyle/>
           <a:p>
             <a:r>
-              <a:t>⏱️ TEMPO STIMATO: 15 Minuti</a:t>
+              <a:t>🎯 OBIETTIVO DIDATTICO:</a:t>
+            </a:r>
+          </a:p>
+          <a:p>
+            <a:r>
+              <a:t>Insegnare a leggere un Boxplot in un contesto aziendale (mediana, quartili e sconti fuori scala).</a:t>
             </a:r>
           </a:p>
           <a:p/>
           <a:p>
             <a:r>
-              <a:t>📘 SPIEGAZIONE PER IL DOCENTE:</a:t>
+              <a:t>⏱️ TIMING:</a:t>
+            </a:r>
+          </a:p>
+          <a:p>
+            <a:r>
+              <a:t>15 Minuti</a:t>
+            </a:r>
+          </a:p>
+          <a:p/>
+          <a:p>
+            <a:r>
+              <a:t>📘 GUIDA DOCENTE:</a:t>
             </a:r>
           </a:p>
           <a:p>
@@ -4095,7 +5199,7 @@
           <a:p/>
           <a:p>
             <a:r>
-              <a:t>💡 SUGGERIMENTI DI CONDUZIONE D'AULA:</a:t>
+              <a:t>💻 DEMO / LABORATORIO:</a:t>
             </a:r>
           </a:p>
           <a:p>
@@ -4103,10 +5207,26 @@
               <a:t>Far notare l'assenza di warning grazie a hue ed esplicito legend=False.</a:t>
             </a:r>
           </a:p>
+          <a:p>
+            <a:r>
+              <a:t>Esecuzione live della demo a schermo e affiancamento degli studenti nello svolgimento dell'esercitazione associata nel notebook/script di laboratorio.</a:t>
+            </a:r>
+          </a:p>
           <a:p/>
           <a:p>
             <a:r>
-              <a:t>❓ DOMANDE CHIAVE DA PORRE AGLI STUDENTI:</a:t>
+              <a:t>⚠️ ERRORI TIPICI:</a:t>
+            </a:r>
+          </a:p>
+          <a:p>
+            <a:r>
+              <a:t>Confusione sintattica tra formati, mancata gestione delle eccezioni o dimenticanza nell'uso di .copy() sulle viste dei dati.</a:t>
+            </a:r>
+          </a:p>
+          <a:p/>
+          <a:p>
+            <a:r>
+              <a:t>❓ DOMANDE AULA:</a:t>
             </a:r>
           </a:p>
           <a:p>
@@ -4181,13 +5301,29 @@
           <a:lstStyle/>
           <a:p>
             <a:r>
-              <a:t>⏱️ TEMPO STIMATO: 15 Minuti</a:t>
+              <a:t>🎯 OBIETTIVO DIDATTICO:</a:t>
+            </a:r>
+          </a:p>
+          <a:p>
+            <a:r>
+              <a:t>Mostrare come la Heatmap renda visibili pattern che in una tabella numerica sfuggirebbero.</a:t>
             </a:r>
           </a:p>
           <a:p/>
           <a:p>
             <a:r>
-              <a:t>📘 SPIEGAZIONE PER IL DOCENTE:</a:t>
+              <a:t>⏱️ TIMING:</a:t>
+            </a:r>
+          </a:p>
+          <a:p>
+            <a:r>
+              <a:t>15 Minuti</a:t>
+            </a:r>
+          </a:p>
+          <a:p/>
+          <a:p>
+            <a:r>
+              <a:t>📘 GUIDA DOCENTE:</a:t>
             </a:r>
           </a:p>
           <a:p>
@@ -4198,7 +5334,7 @@
           <a:p/>
           <a:p>
             <a:r>
-              <a:t>💡 SUGGERIMENTI DI CONDUZIONE D'AULA:</a:t>
+              <a:t>💻 DEMO / LABORATORIO:</a:t>
             </a:r>
           </a:p>
           <a:p>
@@ -4206,10 +5342,26 @@
               <a:t>Spiegare la scelta delle mappe di colore (palette sequenziali).</a:t>
             </a:r>
           </a:p>
+          <a:p>
+            <a:r>
+              <a:t>Esecuzione live della demo a schermo e affiancamento degli studenti nello svolgimento dell'esercitazione associata nel notebook/script di laboratorio.</a:t>
+            </a:r>
+          </a:p>
           <a:p/>
           <a:p>
             <a:r>
-              <a:t>❓ DOMANDE CHIAVE DA PORRE AGLI STUDENTI:</a:t>
+              <a:t>⚠️ ERRORI TIPICI:</a:t>
+            </a:r>
+          </a:p>
+          <a:p>
+            <a:r>
+              <a:t>Confusione sintattica tra formati, mancata gestione delle eccezioni o dimenticanza nell'uso di .copy() sulle viste dei dati.</a:t>
+            </a:r>
+          </a:p>
+          <a:p/>
+          <a:p>
+            <a:r>
+              <a:t>❓ DOMANDE AULA:</a:t>
             </a:r>
           </a:p>
           <a:p>
@@ -4284,13 +5436,29 @@
           <a:lstStyle/>
           <a:p>
             <a:r>
-              <a:t>⏱️ TEMPO STIMATO: 15 Minuti</a:t>
+              <a:t>🎯 OBIETTIVO DIDATTICO:</a:t>
+            </a:r>
+          </a:p>
+          <a:p>
+            <a:r>
+              <a:t>Spiegare l'indicizzazione a matrice degli assi: axes[riga, colonna].</a:t>
             </a:r>
           </a:p>
           <a:p/>
           <a:p>
             <a:r>
-              <a:t>📘 SPIEGAZIONE PER IL DOCENTE:</a:t>
+              <a:t>⏱️ TIMING:</a:t>
+            </a:r>
+          </a:p>
+          <a:p>
+            <a:r>
+              <a:t>15 Minuti</a:t>
+            </a:r>
+          </a:p>
+          <a:p/>
+          <a:p>
+            <a:r>
+              <a:t>📘 GUIDA DOCENTE:</a:t>
             </a:r>
           </a:p>
           <a:p>
@@ -4301,7 +5469,7 @@
           <a:p/>
           <a:p>
             <a:r>
-              <a:t>💡 SUGGERIMENTI DI CONDUZIONE D'AULA:</a:t>
+              <a:t>💻 DEMO / LABORATORIO:</a:t>
             </a:r>
           </a:p>
           <a:p>
@@ -4309,10 +5477,26 @@
               <a:t>Mostrare come comporre una tavola coerente pronta per essere stampata o inserita in un report PDF.</a:t>
             </a:r>
           </a:p>
+          <a:p>
+            <a:r>
+              <a:t>Esecuzione live della demo a schermo e affiancamento degli studenti nello svolgimento dell'esercitazione associata nel notebook/script di laboratorio.</a:t>
+            </a:r>
+          </a:p>
           <a:p/>
           <a:p>
             <a:r>
-              <a:t>❓ DOMANDE CHIAVE DA PORRE AGLI STUDENTI:</a:t>
+              <a:t>⚠️ ERRORI TIPICI:</a:t>
+            </a:r>
+          </a:p>
+          <a:p>
+            <a:r>
+              <a:t>Confusione sintattica tra formati, mancata gestione delle eccezioni o dimenticanza nell'uso di .copy() sulle viste dei dati.</a:t>
+            </a:r>
+          </a:p>
+          <a:p/>
+          <a:p>
+            <a:r>
+              <a:t>❓ DOMANDE AULA:</a:t>
             </a:r>
           </a:p>
           <a:p>
@@ -4387,13 +5571,29 @@
           <a:lstStyle/>
           <a:p>
             <a:r>
-              <a:t>⏱️ TEMPO STIMATO: 15 Minuti</a:t>
+              <a:t>🎯 OBIETTIVO DIDATTICO:</a:t>
+            </a:r>
+          </a:p>
+          <a:p>
+            <a:r>
+              <a:t>Analizzare insieme all'aula il cruscotto finito, commentando i principali insight di business.</a:t>
             </a:r>
           </a:p>
           <a:p/>
           <a:p>
             <a:r>
-              <a:t>📘 SPIEGAZIONE PER IL DOCENTE:</a:t>
+              <a:t>⏱️ TIMING:</a:t>
+            </a:r>
+          </a:p>
+          <a:p>
+            <a:r>
+              <a:t>15 Minuti</a:t>
+            </a:r>
+          </a:p>
+          <a:p/>
+          <a:p>
+            <a:r>
+              <a:t>📘 GUIDA DOCENTE:</a:t>
             </a:r>
           </a:p>
           <a:p>
@@ -4404,7 +5604,7 @@
           <a:p/>
           <a:p>
             <a:r>
-              <a:t>💡 SUGGERIMENTI DI CONDUZIONE D'AULA:</a:t>
+              <a:t>💻 DEMO / LABORATORIO:</a:t>
             </a:r>
           </a:p>
           <a:p>
@@ -4412,10 +5612,26 @@
               <a:t>Far notare l'armonia cromatica e la leggibilità di tutti i testi.</a:t>
             </a:r>
           </a:p>
+          <a:p>
+            <a:r>
+              <a:t>Esecuzione live della demo a schermo e affiancamento degli studenti nello svolgimento dell'esercitazione associata nel notebook/script di laboratorio.</a:t>
+            </a:r>
+          </a:p>
           <a:p/>
           <a:p>
             <a:r>
-              <a:t>❓ DOMANDE CHIAVE DA PORRE AGLI STUDENTI:</a:t>
+              <a:t>⚠️ ERRORI TIPICI:</a:t>
+            </a:r>
+          </a:p>
+          <a:p>
+            <a:r>
+              <a:t>Confusione sintattica tra formati, mancata gestione delle eccezioni o dimenticanza nell'uso di .copy() sulle viste dei dati.</a:t>
+            </a:r>
+          </a:p>
+          <a:p/>
+          <a:p>
+            <a:r>
+              <a:t>❓ DOMANDE AULA:</a:t>
             </a:r>
           </a:p>
           <a:p>
@@ -4490,13 +5706,29 @@
           <a:lstStyle/>
           <a:p>
             <a:r>
-              <a:t>⏱️ TEMPO STIMATO: 45 Minuti</a:t>
+              <a:t>🎯 OBIETTIVO DIDATTICO:</a:t>
+            </a:r>
+          </a:p>
+          <a:p>
+            <a:r>
+              <a:t>Supportare gli studenti nella generazione dei grafici e verificare che i file PNG vengano creati nella cartella corretta.</a:t>
             </a:r>
           </a:p>
           <a:p/>
           <a:p>
             <a:r>
-              <a:t>📘 SPIEGAZIONE PER IL DOCENTE:</a:t>
+              <a:t>⏱️ TIMING:</a:t>
+            </a:r>
+          </a:p>
+          <a:p>
+            <a:r>
+              <a:t>45 Minuti</a:t>
+            </a:r>
+          </a:p>
+          <a:p/>
+          <a:p>
+            <a:r>
+              <a:t>📘 GUIDA DOCENTE:</a:t>
             </a:r>
           </a:p>
           <a:p>
@@ -4507,7 +5739,7 @@
           <a:p/>
           <a:p>
             <a:r>
-              <a:t>💡 SUGGERIMENTI DI CONDUZIONE D'AULA:</a:t>
+              <a:t>💻 DEMO / LABORATORIO:</a:t>
             </a:r>
           </a:p>
           <a:p>
@@ -4515,10 +5747,26 @@
               <a:t>Far verificare la nitidezza dell'immagine a 300 DPI.</a:t>
             </a:r>
           </a:p>
+          <a:p>
+            <a:r>
+              <a:t>Esecuzione live della demo a schermo e affiancamento degli studenti nello svolgimento dell'esercitazione associata nel notebook/script di laboratorio.</a:t>
+            </a:r>
+          </a:p>
           <a:p/>
           <a:p>
             <a:r>
-              <a:t>❓ DOMANDE CHIAVE DA PORRE AGLI STUDENTI:</a:t>
+              <a:t>⚠️ ERRORI TIPICI:</a:t>
+            </a:r>
+          </a:p>
+          <a:p>
+            <a:r>
+              <a:t>Confusione sintattica tra formati, mancata gestione delle eccezioni o dimenticanza nell'uso di .copy() sulle viste dei dati.</a:t>
+            </a:r>
+          </a:p>
+          <a:p/>
+          <a:p>
+            <a:r>
+              <a:t>❓ DOMANDE AULA:</a:t>
             </a:r>
           </a:p>
           <a:p>
@@ -4593,13 +5841,29 @@
           <a:lstStyle/>
           <a:p>
             <a:r>
-              <a:t>⏱️ TEMPO STIMATO: 10 Minuti</a:t>
+              <a:t>🎯 OBIETTIVO DIDATTICO:</a:t>
+            </a:r>
+          </a:p>
+          <a:p>
+            <a:r>
+              <a:t>Riepilogare i progressi didattici: dalla sintassi base alla visualizzazione direzionale.</a:t>
             </a:r>
           </a:p>
           <a:p/>
           <a:p>
             <a:r>
-              <a:t>📘 SPIEGAZIONE PER IL DOCENTE:</a:t>
+              <a:t>⏱️ TIMING:</a:t>
+            </a:r>
+          </a:p>
+          <a:p>
+            <a:r>
+              <a:t>10 Minuti</a:t>
+            </a:r>
+          </a:p>
+          <a:p/>
+          <a:p>
+            <a:r>
+              <a:t>📘 GUIDA DOCENTE:</a:t>
             </a:r>
           </a:p>
           <a:p>
@@ -4610,7 +5874,7 @@
           <a:p/>
           <a:p>
             <a:r>
-              <a:t>💡 SUGGERIMENTI DI CONDUZIONE D'AULA:</a:t>
+              <a:t>💻 DEMO / LABORATORIO:</a:t>
             </a:r>
           </a:p>
           <a:p>
@@ -4618,10 +5882,26 @@
               <a:t>Introdurre il concetto di pipeline industriale automatizzata.</a:t>
             </a:r>
           </a:p>
+          <a:p>
+            <a:r>
+              <a:t>Esecuzione live della demo a schermo e affiancamento degli studenti nello svolgimento dell'esercitazione associata nel notebook/script di laboratorio.</a:t>
+            </a:r>
+          </a:p>
           <a:p/>
           <a:p>
             <a:r>
-              <a:t>❓ DOMANDE CHIAVE DA PORRE AGLI STUDENTI:</a:t>
+              <a:t>⚠️ ERRORI TIPICI:</a:t>
+            </a:r>
+          </a:p>
+          <a:p>
+            <a:r>
+              <a:t>Confusione sintattica tra formati, mancata gestione delle eccezioni o dimenticanza nell'uso di .copy() sulle viste dei dati.</a:t>
+            </a:r>
+          </a:p>
+          <a:p/>
+          <a:p>
+            <a:r>
+              <a:t>❓ DOMANDE AULA:</a:t>
             </a:r>
           </a:p>
           <a:p>
@@ -4696,13 +5976,29 @@
           <a:lstStyle/>
           <a:p>
             <a:r>
-              <a:t>⏱️ TEMPO STIMATO: 15 Minuti</a:t>
+              <a:t>🎯 OBIETTIVO DIDATTICO:</a:t>
+            </a:r>
+          </a:p>
+          <a:p>
+            <a:r>
+              <a:t>Introdurre il concetto cardine di ETL (Extract-Transform-Load) nell'ingegneria del dato.</a:t>
             </a:r>
           </a:p>
           <a:p/>
           <a:p>
             <a:r>
-              <a:t>📘 SPIEGAZIONE PER IL DOCENTE:</a:t>
+              <a:t>⏱️ TIMING:</a:t>
+            </a:r>
+          </a:p>
+          <a:p>
+            <a:r>
+              <a:t>15 Minuti</a:t>
+            </a:r>
+          </a:p>
+          <a:p/>
+          <a:p>
+            <a:r>
+              <a:t>📘 GUIDA DOCENTE:</a:t>
             </a:r>
           </a:p>
           <a:p>
@@ -4713,7 +6009,7 @@
           <a:p/>
           <a:p>
             <a:r>
-              <a:t>💡 SUGGERIMENTI DI CONDUZIONE D'AULA:</a:t>
+              <a:t>💻 DEMO / LABORATORIO:</a:t>
             </a:r>
           </a:p>
           <a:p>
@@ -4721,10 +6017,26 @@
               <a:t>Mostrare lo schema delle 3 fasi operative.</a:t>
             </a:r>
           </a:p>
+          <a:p>
+            <a:r>
+              <a:t>Esecuzione live della demo a schermo e affiancamento degli studenti nello svolgimento dell'esercitazione associata nel notebook/script di laboratorio.</a:t>
+            </a:r>
+          </a:p>
           <a:p/>
           <a:p>
             <a:r>
-              <a:t>❓ DOMANDE CHIAVE DA PORRE AGLI STUDENTI:</a:t>
+              <a:t>⚠️ ERRORI TIPICI:</a:t>
+            </a:r>
+          </a:p>
+          <a:p>
+            <a:r>
+              <a:t>Confusione sintattica tra formati, mancata gestione delle eccezioni o dimenticanza nell'uso di .copy() sulle viste dei dati.</a:t>
+            </a:r>
+          </a:p>
+          <a:p/>
+          <a:p>
+            <a:r>
+              <a:t>❓ DOMANDE AULA:</a:t>
             </a:r>
           </a:p>
           <a:p>
@@ -4799,13 +6111,29 @@
           <a:lstStyle/>
           <a:p>
             <a:r>
-              <a:t>⏱️ TEMPO STIMATO: 15 Minuti</a:t>
+              <a:t>🎯 OBIETTIVO DIDATTICO:</a:t>
+            </a:r>
+          </a:p>
+          <a:p>
+            <a:r>
+              <a:t>Mostrare come il codice non debba mai contenere percorsi fissi (hardcoded).</a:t>
             </a:r>
           </a:p>
           <a:p/>
           <a:p>
             <a:r>
-              <a:t>📘 SPIEGAZIONE PER IL DOCENTE:</a:t>
+              <a:t>⏱️ TIMING:</a:t>
+            </a:r>
+          </a:p>
+          <a:p>
+            <a:r>
+              <a:t>15 Minuti</a:t>
+            </a:r>
+          </a:p>
+          <a:p/>
+          <a:p>
+            <a:r>
+              <a:t>📘 GUIDA DOCENTE:</a:t>
             </a:r>
           </a:p>
           <a:p>
@@ -4816,7 +6144,7 @@
           <a:p/>
           <a:p>
             <a:r>
-              <a:t>💡 SUGGERIMENTI DI CONDUZIONE D'AULA:</a:t>
+              <a:t>💻 DEMO / LABORATORIO:</a:t>
             </a:r>
           </a:p>
           <a:p>
@@ -4824,10 +6152,26 @@
               <a:t>Far testare la scansione dinamica sui file presenti in dataset/raw/.</a:t>
             </a:r>
           </a:p>
+          <a:p>
+            <a:r>
+              <a:t>Esecuzione live della demo a schermo e affiancamento degli studenti nello svolgimento dell'esercitazione associata nel notebook/script di laboratorio.</a:t>
+            </a:r>
+          </a:p>
           <a:p/>
           <a:p>
             <a:r>
-              <a:t>❓ DOMANDE CHIAVE DA PORRE AGLI STUDENTI:</a:t>
+              <a:t>⚠️ ERRORI TIPICI:</a:t>
+            </a:r>
+          </a:p>
+          <a:p>
+            <a:r>
+              <a:t>Confusione sintattica tra formati, mancata gestione delle eccezioni o dimenticanza nell'uso di .copy() sulle viste dei dati.</a:t>
+            </a:r>
+          </a:p>
+          <a:p/>
+          <a:p>
+            <a:r>
+              <a:t>❓ DOMANDE AULA:</a:t>
             </a:r>
           </a:p>
           <a:p>
@@ -4902,13 +6246,29 @@
           <a:lstStyle/>
           <a:p>
             <a:r>
-              <a:t>⏱️ TEMPO STIMATO: 15 Minuti</a:t>
+              <a:t>🎯 OBIETTIVO DIDATTICO:</a:t>
+            </a:r>
+          </a:p>
+          <a:p>
+            <a:r>
+              <a:t>Spiegare la concatenazione verticale di tabelle con le stesse colonne.</a:t>
             </a:r>
           </a:p>
           <a:p/>
           <a:p>
             <a:r>
-              <a:t>📘 SPIEGAZIONE PER IL DOCENTE:</a:t>
+              <a:t>⏱️ TIMING:</a:t>
+            </a:r>
+          </a:p>
+          <a:p>
+            <a:r>
+              <a:t>15 Minuti</a:t>
+            </a:r>
+          </a:p>
+          <a:p/>
+          <a:p>
+            <a:r>
+              <a:t>📘 GUIDA DOCENTE:</a:t>
             </a:r>
           </a:p>
           <a:p>
@@ -4919,7 +6279,7 @@
           <a:p/>
           <a:p>
             <a:r>
-              <a:t>💡 SUGGERIMENTI DI CONDUZIONE D'AULA:</a:t>
+              <a:t>💻 DEMO / LABORATORIO:</a:t>
             </a:r>
           </a:p>
           <a:p>
@@ -4927,10 +6287,26 @@
               <a:t>Mostrare come 3 file separati diventino un unico master dataset da 3.744 righe grezze.</a:t>
             </a:r>
           </a:p>
+          <a:p>
+            <a:r>
+              <a:t>Esecuzione live della demo a schermo e affiancamento degli studenti nello svolgimento dell'esercitazione associata nel notebook/script di laboratorio.</a:t>
+            </a:r>
+          </a:p>
           <a:p/>
           <a:p>
             <a:r>
-              <a:t>❓ DOMANDE CHIAVE DA PORRE AGLI STUDENTI:</a:t>
+              <a:t>⚠️ ERRORI TIPICI:</a:t>
+            </a:r>
+          </a:p>
+          <a:p>
+            <a:r>
+              <a:t>Confusione sintattica tra formati, mancata gestione delle eccezioni o dimenticanza nell'uso di .copy() sulle viste dei dati.</a:t>
+            </a:r>
+          </a:p>
+          <a:p/>
+          <a:p>
+            <a:r>
+              <a:t>❓ DOMANDE AULA:</a:t>
             </a:r>
           </a:p>
           <a:p>
@@ -5005,13 +6381,29 @@
           <a:lstStyle/>
           <a:p>
             <a:r>
-              <a:t>⏱️ TEMPO STIMATO: 15 Minuti</a:t>
+              <a:t>🎯 OBIETTIVO DIDATTICO:</a:t>
+            </a:r>
+          </a:p>
+          <a:p>
+            <a:r>
+              <a:t>Sottolineare il principio DRY (Don't Repeat Yourself) applicato alle trasformazioni dei dati.</a:t>
             </a:r>
           </a:p>
           <a:p/>
           <a:p>
             <a:r>
-              <a:t>📘 SPIEGAZIONE PER IL DOCENTE:</a:t>
+              <a:t>⏱️ TIMING:</a:t>
+            </a:r>
+          </a:p>
+          <a:p>
+            <a:r>
+              <a:t>15 Minuti</a:t>
+            </a:r>
+          </a:p>
+          <a:p/>
+          <a:p>
+            <a:r>
+              <a:t>📘 GUIDA DOCENTE:</a:t>
             </a:r>
           </a:p>
           <a:p>
@@ -5022,7 +6414,7 @@
           <a:p/>
           <a:p>
             <a:r>
-              <a:t>💡 SUGGERIMENTI DI CONDUZIONE D'AULA:</a:t>
+              <a:t>💻 DEMO / LABORATORIO:</a:t>
             </a:r>
           </a:p>
           <a:p>
@@ -5030,10 +6422,26 @@
               <a:t>Mostrare come il codice sia pulito, testabile e manutenibile.</a:t>
             </a:r>
           </a:p>
+          <a:p>
+            <a:r>
+              <a:t>Esecuzione live della demo a schermo e affiancamento degli studenti nello svolgimento dell'esercitazione associata nel notebook/script di laboratorio.</a:t>
+            </a:r>
+          </a:p>
           <a:p/>
           <a:p>
             <a:r>
-              <a:t>❓ DOMANDE CHIAVE DA PORRE AGLI STUDENTI:</a:t>
+              <a:t>⚠️ ERRORI TIPICI:</a:t>
+            </a:r>
+          </a:p>
+          <a:p>
+            <a:r>
+              <a:t>Confusione sintattica tra formati, mancata gestione delle eccezioni o dimenticanza nell'uso di .copy() sulle viste dei dati.</a:t>
+            </a:r>
+          </a:p>
+          <a:p/>
+          <a:p>
+            <a:r>
+              <a:t>❓ DOMANDE AULA:</a:t>
             </a:r>
           </a:p>
           <a:p>
@@ -5108,13 +6516,29 @@
           <a:lstStyle/>
           <a:p>
             <a:r>
-              <a:t>⏱️ TEMPO STIMATO: 15 Minuti</a:t>
+              <a:t>🎯 OBIETTIVO DIDATTICO:</a:t>
+            </a:r>
+          </a:p>
+          <a:p>
+            <a:r>
+              <a:t>Evidenziare la potenza della list comprehension rispetto ai cicli for tradizionali.</a:t>
             </a:r>
           </a:p>
           <a:p/>
           <a:p>
             <a:r>
-              <a:t>📘 SPIEGAZIONE PER IL DOCENTE:</a:t>
+              <a:t>⏱️ TIMING:</a:t>
+            </a:r>
+          </a:p>
+          <a:p>
+            <a:r>
+              <a:t>15 Minuti</a:t>
+            </a:r>
+          </a:p>
+          <a:p/>
+          <a:p>
+            <a:r>
+              <a:t>📘 GUIDA DOCENTE:</a:t>
             </a:r>
           </a:p>
           <a:p>
@@ -5125,7 +6549,7 @@
           <a:p/>
           <a:p>
             <a:r>
-              <a:t>💡 SUGGERIMENTI DI CONDUZIONE D'AULA:</a:t>
+              <a:t>💻 DEMO / LABORATORIO:</a:t>
             </a:r>
           </a:p>
           <a:p>
@@ -5133,10 +6557,26 @@
               <a:t>Mostrare come calcolare somme e filtri in una sola riga leggibile ed espressiva.</a:t>
             </a:r>
           </a:p>
+          <a:p>
+            <a:r>
+              <a:t>Esecuzione live della demo a schermo e affiancamento degli studenti nello svolgimento dell'esercitazione associata nel notebook/script di laboratorio.</a:t>
+            </a:r>
+          </a:p>
           <a:p/>
           <a:p>
             <a:r>
-              <a:t>❓ DOMANDE CHIAVE DA PORRE AGLI STUDENTI:</a:t>
+              <a:t>⚠️ ERRORI TIPICI:</a:t>
+            </a:r>
+          </a:p>
+          <a:p>
+            <a:r>
+              <a:t>Confusione sintattica tra formati, mancata gestione delle eccezioni o dimenticanza nell'uso di .copy() sulle viste dei dati.</a:t>
+            </a:r>
+          </a:p>
+          <a:p/>
+          <a:p>
+            <a:r>
+              <a:t>❓ DOMANDE AULA:</a:t>
             </a:r>
           </a:p>
           <a:p>
@@ -5211,13 +6651,29 @@
           <a:lstStyle/>
           <a:p>
             <a:r>
-              <a:t>⏱️ TEMPO STIMATO: 15 Minuti</a:t>
+              <a:t>🎯 OBIETTIVO DIDATTICO:</a:t>
+            </a:r>
+          </a:p>
+          <a:p>
+            <a:r>
+              <a:t>Spiegare perché il logging è fondamentale negli ambienti server e nei processi automatici notturni.</a:t>
             </a:r>
           </a:p>
           <a:p/>
           <a:p>
             <a:r>
-              <a:t>📘 SPIEGAZIONE PER IL DOCENTE:</a:t>
+              <a:t>⏱️ TIMING:</a:t>
+            </a:r>
+          </a:p>
+          <a:p>
+            <a:r>
+              <a:t>15 Minuti</a:t>
+            </a:r>
+          </a:p>
+          <a:p/>
+          <a:p>
+            <a:r>
+              <a:t>📘 GUIDA DOCENTE:</a:t>
             </a:r>
           </a:p>
           <a:p>
@@ -5228,7 +6684,7 @@
           <a:p/>
           <a:p>
             <a:r>
-              <a:t>💡 SUGGERIMENTI DI CONDUZIONE D'AULA:</a:t>
+              <a:t>💻 DEMO / LABORATORIO:</a:t>
             </a:r>
           </a:p>
           <a:p>
@@ -5236,10 +6692,26 @@
               <a:t>Mostrare l'output formattato con orari e livelli su terminale.</a:t>
             </a:r>
           </a:p>
+          <a:p>
+            <a:r>
+              <a:t>Esecuzione live della demo a schermo e affiancamento degli studenti nello svolgimento dell'esercitazione associata nel notebook/script di laboratorio.</a:t>
+            </a:r>
+          </a:p>
           <a:p/>
           <a:p>
             <a:r>
-              <a:t>❓ DOMANDE CHIAVE DA PORRE AGLI STUDENTI:</a:t>
+              <a:t>⚠️ ERRORI TIPICI:</a:t>
+            </a:r>
+          </a:p>
+          <a:p>
+            <a:r>
+              <a:t>Confusione sintattica tra formati, mancata gestione delle eccezioni o dimenticanza nell'uso di .copy() sulle viste dei dati.</a:t>
+            </a:r>
+          </a:p>
+          <a:p/>
+          <a:p>
+            <a:r>
+              <a:t>❓ DOMANDE AULA:</a:t>
             </a:r>
           </a:p>
           <a:p>
@@ -5314,13 +6786,29 @@
           <a:lstStyle/>
           <a:p>
             <a:r>
-              <a:t>⏱️ TEMPO STIMATO: 15 Minuti</a:t>
+              <a:t>🎯 OBIETTIVO DIDATTICO:</a:t>
+            </a:r>
+          </a:p>
+          <a:p>
+            <a:r>
+              <a:t>Spiegare il funzionamento dei formati colonnari rispetto ai formati a riga (CSV/Excel).</a:t>
             </a:r>
           </a:p>
           <a:p/>
           <a:p>
             <a:r>
-              <a:t>📘 SPIEGAZIONE PER IL DOCENTE:</a:t>
+              <a:t>⏱️ TIMING:</a:t>
+            </a:r>
+          </a:p>
+          <a:p>
+            <a:r>
+              <a:t>15 Minuti</a:t>
+            </a:r>
+          </a:p>
+          <a:p/>
+          <a:p>
+            <a:r>
+              <a:t>📘 GUIDA DOCENTE:</a:t>
             </a:r>
           </a:p>
           <a:p>
@@ -5331,7 +6819,7 @@
           <a:p/>
           <a:p>
             <a:r>
-              <a:t>💡 SUGGERIMENTI DI CONDUZIONE D'AULA:</a:t>
+              <a:t>💻 DEMO / LABORATORIO:</a:t>
             </a:r>
           </a:p>
           <a:p>
@@ -5339,10 +6827,26 @@
               <a:t>Mostrare le dimensioni ridotte del file Parquet su disco.</a:t>
             </a:r>
           </a:p>
+          <a:p>
+            <a:r>
+              <a:t>Esecuzione live della demo a schermo e affiancamento degli studenti nello svolgimento dell'esercitazione associata nel notebook/script di laboratorio.</a:t>
+            </a:r>
+          </a:p>
           <a:p/>
           <a:p>
             <a:r>
-              <a:t>❓ DOMANDE CHIAVE DA PORRE AGLI STUDENTI:</a:t>
+              <a:t>⚠️ ERRORI TIPICI:</a:t>
+            </a:r>
+          </a:p>
+          <a:p>
+            <a:r>
+              <a:t>Confusione sintattica tra formati, mancata gestione delle eccezioni o dimenticanza nell'uso di .copy() sulle viste dei dati.</a:t>
+            </a:r>
+          </a:p>
+          <a:p/>
+          <a:p>
+            <a:r>
+              <a:t>❓ DOMANDE AULA:</a:t>
             </a:r>
           </a:p>
           <a:p>
@@ -5417,13 +6921,29 @@
           <a:lstStyle/>
           <a:p>
             <a:r>
-              <a:t>⏱️ TEMPO STIMATO: 15 Minuti</a:t>
+              <a:t>🎯 OBIETTIVO DIDATTICO:</a:t>
+            </a:r>
+          </a:p>
+          <a:p>
+            <a:r>
+              <a:t>Mostrare il file Excel generato aprendolo a schermo per far vedere le 4 schede riepilogative.</a:t>
             </a:r>
           </a:p>
           <a:p/>
           <a:p>
             <a:r>
-              <a:t>📘 SPIEGAZIONE PER IL DOCENTE:</a:t>
+              <a:t>⏱️ TIMING:</a:t>
+            </a:r>
+          </a:p>
+          <a:p>
+            <a:r>
+              <a:t>15 Minuti</a:t>
+            </a:r>
+          </a:p>
+          <a:p/>
+          <a:p>
+            <a:r>
+              <a:t>📘 GUIDA DOCENTE:</a:t>
             </a:r>
           </a:p>
           <a:p>
@@ -5434,7 +6954,7 @@
           <a:p/>
           <a:p>
             <a:r>
-              <a:t>💡 SUGGERIMENTI DI CONDUZIONE D'AULA:</a:t>
+              <a:t>💻 DEMO / LABORATORIO:</a:t>
             </a:r>
           </a:p>
           <a:p>
@@ -5442,10 +6962,26 @@
               <a:t>Far notare che questo file viene prodotto automaticamente in meno di 2 secondi.</a:t>
             </a:r>
           </a:p>
+          <a:p>
+            <a:r>
+              <a:t>Esecuzione live della demo a schermo e affiancamento degli studenti nello svolgimento dell'esercitazione associata nel notebook/script di laboratorio.</a:t>
+            </a:r>
+          </a:p>
           <a:p/>
           <a:p>
             <a:r>
-              <a:t>❓ DOMANDE CHIAVE DA PORRE AGLI STUDENTI:</a:t>
+              <a:t>⚠️ ERRORI TIPICI:</a:t>
+            </a:r>
+          </a:p>
+          <a:p>
+            <a:r>
+              <a:t>Confusione sintattica tra formati, mancata gestione delle eccezioni o dimenticanza nell'uso di .copy() sulle viste dei dati.</a:t>
+            </a:r>
+          </a:p>
+          <a:p/>
+          <a:p>
+            <a:r>
+              <a:t>❓ DOMANDE AULA:</a:t>
             </a:r>
           </a:p>
           <a:p>
@@ -5520,13 +7056,29 @@
           <a:lstStyle/>
           <a:p>
             <a:r>
-              <a:t>⏱️ TEMPO STIMATO: 10 Minuti</a:t>
+              <a:t>🎯 OBIETTIVO DIDATTICO:</a:t>
+            </a:r>
+          </a:p>
+          <a:p>
+            <a:r>
+              <a:t>Congratularsi con l'aula: la pipeline è operativa e produce dati certificati.</a:t>
             </a:r>
           </a:p>
           <a:p/>
           <a:p>
             <a:r>
-              <a:t>📘 SPIEGAZIONE PER IL DOCENTE:</a:t>
+              <a:t>⏱️ TIMING:</a:t>
+            </a:r>
+          </a:p>
+          <a:p>
+            <a:r>
+              <a:t>10 Minuti</a:t>
+            </a:r>
+          </a:p>
+          <a:p/>
+          <a:p>
+            <a:r>
+              <a:t>📘 GUIDA DOCENTE:</a:t>
             </a:r>
           </a:p>
           <a:p>
@@ -5537,7 +7089,7 @@
           <a:p/>
           <a:p>
             <a:r>
-              <a:t>💡 SUGGERIMENTI DI CONDUZIONE D'AULA:</a:t>
+              <a:t>💻 DEMO / LABORATORIO:</a:t>
             </a:r>
           </a:p>
           <a:p>
@@ -5545,10 +7097,26 @@
               <a:t>Lanciare la soluzione sol05_automazione_pipeline.py a schermo intero.</a:t>
             </a:r>
           </a:p>
+          <a:p>
+            <a:r>
+              <a:t>Esecuzione live della demo a schermo e affiancamento degli studenti nello svolgimento dell'esercitazione associata nel notebook/script di laboratorio.</a:t>
+            </a:r>
+          </a:p>
           <a:p/>
           <a:p>
             <a:r>
-              <a:t>❓ DOMANDE CHIAVE DA PORRE AGLI STUDENTI:</a:t>
+              <a:t>⚠️ ERRORI TIPICI:</a:t>
+            </a:r>
+          </a:p>
+          <a:p>
+            <a:r>
+              <a:t>Confusione sintattica tra formati, mancata gestione delle eccezioni o dimenticanza nell'uso di .copy() sulle viste dei dati.</a:t>
+            </a:r>
+          </a:p>
+          <a:p/>
+          <a:p>
+            <a:r>
+              <a:t>❓ DOMANDE AULA:</a:t>
             </a:r>
           </a:p>
           <a:p>
@@ -5623,13 +7191,29 @@
           <a:lstStyle/>
           <a:p>
             <a:r>
-              <a:t>⏱️ TEMPO STIMATO: 15 Minuti</a:t>
+              <a:t>🎯 OBIETTIVO DIDATTICO:</a:t>
+            </a:r>
+          </a:p>
+          <a:p>
+            <a:r>
+              <a:t>Presentare Streamlit come lo strumento leader per Data Science e Business Intelligence in Python.</a:t>
             </a:r>
           </a:p>
           <a:p/>
           <a:p>
             <a:r>
-              <a:t>📘 SPIEGAZIONE PER IL DOCENTE:</a:t>
+              <a:t>⏱️ TIMING:</a:t>
+            </a:r>
+          </a:p>
+          <a:p>
+            <a:r>
+              <a:t>15 Minuti</a:t>
+            </a:r>
+          </a:p>
+          <a:p/>
+          <a:p>
+            <a:r>
+              <a:t>📘 GUIDA DOCENTE:</a:t>
             </a:r>
           </a:p>
           <a:p>
@@ -5640,7 +7224,7 @@
           <a:p/>
           <a:p>
             <a:r>
-              <a:t>💡 SUGGERIMENTI DI CONDUZIONE D'AULA:</a:t>
+              <a:t>💻 DEMO / LABORATORIO:</a:t>
             </a:r>
           </a:p>
           <a:p>
@@ -5648,10 +7232,26 @@
               <a:t>Far avviare la prima app starter agli studenti su porta locale.</a:t>
             </a:r>
           </a:p>
+          <a:p>
+            <a:r>
+              <a:t>Esecuzione live della demo a schermo e affiancamento degli studenti nello svolgimento dell'esercitazione associata nel notebook/script di laboratorio.</a:t>
+            </a:r>
+          </a:p>
           <a:p/>
           <a:p>
             <a:r>
-              <a:t>❓ DOMANDE CHIAVE DA PORRE AGLI STUDENTI:</a:t>
+              <a:t>⚠️ ERRORI TIPICI:</a:t>
+            </a:r>
+          </a:p>
+          <a:p>
+            <a:r>
+              <a:t>Confusione sintattica tra formati, mancata gestione delle eccezioni o dimenticanza nell'uso di .copy() sulle viste dei dati.</a:t>
+            </a:r>
+          </a:p>
+          <a:p/>
+          <a:p>
+            <a:r>
+              <a:t>❓ DOMANDE AULA:</a:t>
             </a:r>
           </a:p>
           <a:p>
@@ -5726,13 +7326,29 @@
           <a:lstStyle/>
           <a:p>
             <a:r>
-              <a:t>⏱️ TEMPO STIMATO: 15 Minuti</a:t>
+              <a:t>🎯 OBIETTIVO DIDATTICO:</a:t>
+            </a:r>
+          </a:p>
+          <a:p>
+            <a:r>
+              <a:t>Spiegare il meccanismo interno di hashing e caching di Streamlit.</a:t>
             </a:r>
           </a:p>
           <a:p/>
           <a:p>
             <a:r>
-              <a:t>📘 SPIEGAZIONE PER IL DOCENTE:</a:t>
+              <a:t>⏱️ TIMING:</a:t>
+            </a:r>
+          </a:p>
+          <a:p>
+            <a:r>
+              <a:t>15 Minuti</a:t>
+            </a:r>
+          </a:p>
+          <a:p/>
+          <a:p>
+            <a:r>
+              <a:t>📘 GUIDA DOCENTE:</a:t>
             </a:r>
           </a:p>
           <a:p>
@@ -5743,7 +7359,7 @@
           <a:p/>
           <a:p>
             <a:r>
-              <a:t>💡 SUGGERIMENTI DI CONDUZIONE D'AULA:</a:t>
+              <a:t>💻 DEMO / LABORATORIO:</a:t>
             </a:r>
           </a:p>
           <a:p>
@@ -5751,10 +7367,26 @@
               <a:t>Dimostrare la velocità di reazione dell'interfaccia con e senza cache.</a:t>
             </a:r>
           </a:p>
+          <a:p>
+            <a:r>
+              <a:t>Esecuzione live della demo a schermo e affiancamento degli studenti nello svolgimento dell'esercitazione associata nel notebook/script di laboratorio.</a:t>
+            </a:r>
+          </a:p>
           <a:p/>
           <a:p>
             <a:r>
-              <a:t>❓ DOMANDE CHIAVE DA PORRE AGLI STUDENTI:</a:t>
+              <a:t>⚠️ ERRORI TIPICI:</a:t>
+            </a:r>
+          </a:p>
+          <a:p>
+            <a:r>
+              <a:t>Confusione sintattica tra formati, mancata gestione delle eccezioni o dimenticanza nell'uso di .copy() sulle viste dei dati.</a:t>
+            </a:r>
+          </a:p>
+          <a:p/>
+          <a:p>
+            <a:r>
+              <a:t>❓ DOMANDE AULA:</a:t>
             </a:r>
           </a:p>
           <a:p>
@@ -5829,13 +7461,29 @@
           <a:lstStyle/>
           <a:p>
             <a:r>
-              <a:t>⏱️ TEMPO STIMATO: 15 Minuti</a:t>
+              <a:t>🎯 OBIETTIVO DIDATTICO:</a:t>
+            </a:r>
+          </a:p>
+          <a:p>
+            <a:r>
+              <a:t>Mostrare come aggiungere widget nella sidebar semplicemente anteponendo st.</a:t>
             </a:r>
           </a:p>
           <a:p/>
           <a:p>
             <a:r>
-              <a:t>📘 SPIEGAZIONE PER IL DOCENTE:</a:t>
+              <a:t>⏱️ TIMING:</a:t>
+            </a:r>
+          </a:p>
+          <a:p>
+            <a:r>
+              <a:t>15 Minuti</a:t>
+            </a:r>
+          </a:p>
+          <a:p/>
+          <a:p>
+            <a:r>
+              <a:t>📘 GUIDA DOCENTE:</a:t>
             </a:r>
           </a:p>
           <a:p>
@@ -5846,7 +7494,7 @@
           <a:p/>
           <a:p>
             <a:r>
-              <a:t>💡 SUGGERIMENTI DI CONDUZIONE D'AULA:</a:t>
+              <a:t>💻 DEMO / LABORATORIO:</a:t>
             </a:r>
           </a:p>
           <a:p>
@@ -5854,10 +7502,26 @@
               <a:t>Far provare la selezione e deselezione delle filiali a schermo.</a:t>
             </a:r>
           </a:p>
+          <a:p>
+            <a:r>
+              <a:t>Esecuzione live della demo a schermo e affiancamento degli studenti nello svolgimento dell'esercitazione associata nel notebook/script di laboratorio.</a:t>
+            </a:r>
+          </a:p>
           <a:p/>
           <a:p>
             <a:r>
-              <a:t>❓ DOMANDE CHIAVE DA PORRE AGLI STUDENTI:</a:t>
+              <a:t>⚠️ ERRORI TIPICI:</a:t>
+            </a:r>
+          </a:p>
+          <a:p>
+            <a:r>
+              <a:t>Confusione sintattica tra formati, mancata gestione delle eccezioni o dimenticanza nell'uso di .copy() sulle viste dei dati.</a:t>
+            </a:r>
+          </a:p>
+          <a:p/>
+          <a:p>
+            <a:r>
+              <a:t>❓ DOMANDE AULA:</a:t>
             </a:r>
           </a:p>
           <a:p>
@@ -5932,13 +7596,29 @@
           <a:lstStyle/>
           <a:p>
             <a:r>
-              <a:t>⏱️ TEMPO STIMATO: 15 Minuti</a:t>
+              <a:t>🎯 OBIETTIVO DIDATTICO:</a:t>
+            </a:r>
+          </a:p>
+          <a:p>
+            <a:r>
+              <a:t>Spiegare la gestione della tupla restituita da st.</a:t>
             </a:r>
           </a:p>
           <a:p/>
           <a:p>
             <a:r>
-              <a:t>📘 SPIEGAZIONE PER IL DOCENTE:</a:t>
+              <a:t>⏱️ TIMING:</a:t>
+            </a:r>
+          </a:p>
+          <a:p>
+            <a:r>
+              <a:t>15 Minuti</a:t>
+            </a:r>
+          </a:p>
+          <a:p/>
+          <a:p>
+            <a:r>
+              <a:t>📘 GUIDA DOCENTE:</a:t>
             </a:r>
           </a:p>
           <a:p>
@@ -5949,7 +7629,7 @@
           <a:p/>
           <a:p>
             <a:r>
-              <a:t>💡 SUGGERIMENTI DI CONDUZIONE D'AULA:</a:t>
+              <a:t>💻 DEMO / LABORATORIO:</a:t>
             </a:r>
           </a:p>
           <a:p>
@@ -5957,10 +7637,26 @@
               <a:t>Mostrare come il filtro temporale aggiorni istantaneamente tutti i KPI della pagina.</a:t>
             </a:r>
           </a:p>
+          <a:p>
+            <a:r>
+              <a:t>Esecuzione live della demo a schermo e affiancamento degli studenti nello svolgimento dell'esercitazione associata nel notebook/script di laboratorio.</a:t>
+            </a:r>
+          </a:p>
           <a:p/>
           <a:p>
             <a:r>
-              <a:t>❓ DOMANDE CHIAVE DA PORRE AGLI STUDENTI:</a:t>
+              <a:t>⚠️ ERRORI TIPICI:</a:t>
+            </a:r>
+          </a:p>
+          <a:p>
+            <a:r>
+              <a:t>Confusione sintattica tra formati, mancata gestione delle eccezioni o dimenticanza nell'uso di .copy() sulle viste dei dati.</a:t>
+            </a:r>
+          </a:p>
+          <a:p/>
+          <a:p>
+            <a:r>
+              <a:t>❓ DOMANDE AULA:</a:t>
             </a:r>
           </a:p>
           <a:p>
@@ -6035,13 +7731,29 @@
           <a:lstStyle/>
           <a:p>
             <a:r>
-              <a:t>⏱️ TEMPO STIMATO: 15 Minuti</a:t>
+              <a:t>🎯 OBIETTIVO DIDATTICO:</a:t>
+            </a:r>
+          </a:p>
+          <a:p>
+            <a:r>
+              <a:t>Mostrare l'impatto visivo delle card KPI all'apertura dell'applicazione.</a:t>
             </a:r>
           </a:p>
           <a:p/>
           <a:p>
             <a:r>
-              <a:t>📘 SPIEGAZIONE PER IL DOCENTE:</a:t>
+              <a:t>⏱️ TIMING:</a:t>
+            </a:r>
+          </a:p>
+          <a:p>
+            <a:r>
+              <a:t>15 Minuti</a:t>
+            </a:r>
+          </a:p>
+          <a:p/>
+          <a:p>
+            <a:r>
+              <a:t>📘 GUIDA DOCENTE:</a:t>
             </a:r>
           </a:p>
           <a:p>
@@ -6052,7 +7764,7 @@
           <a:p/>
           <a:p>
             <a:r>
-              <a:t>💡 SUGGERIMENTI DI CONDUZIONE D'AULA:</a:t>
+              <a:t>💻 DEMO / LABORATORIO:</a:t>
             </a:r>
           </a:p>
           <a:p>
@@ -6060,10 +7772,26 @@
               <a:t>Spiegare come i valori si ricalcolino dinamicamente in base ai filtri applicati.</a:t>
             </a:r>
           </a:p>
+          <a:p>
+            <a:r>
+              <a:t>Esecuzione live della demo a schermo e affiancamento degli studenti nello svolgimento dell'esercitazione associata nel notebook/script di laboratorio.</a:t>
+            </a:r>
+          </a:p>
           <a:p/>
           <a:p>
             <a:r>
-              <a:t>❓ DOMANDE CHIAVE DA PORRE AGLI STUDENTI:</a:t>
+              <a:t>⚠️ ERRORI TIPICI:</a:t>
+            </a:r>
+          </a:p>
+          <a:p>
+            <a:r>
+              <a:t>Confusione sintattica tra formati, mancata gestione delle eccezioni o dimenticanza nell'uso di .copy() sulle viste dei dati.</a:t>
+            </a:r>
+          </a:p>
+          <a:p/>
+          <a:p>
+            <a:r>
+              <a:t>❓ DOMANDE AULA:</a:t>
             </a:r>
           </a:p>
           <a:p>
@@ -6138,13 +7866,29 @@
           <a:lstStyle/>
           <a:p>
             <a:r>
-              <a:t>⏱️ TEMPO STIMATO: 15 Minuti</a:t>
+              <a:t>🎯 OBIETTIVO DIDATTICO:</a:t>
+            </a:r>
+          </a:p>
+          <a:p>
+            <a:r>
+              <a:t>Spiegare il pattern with tab: per popolare ciascuna scheda in modo ordinato.</a:t>
             </a:r>
           </a:p>
           <a:p/>
           <a:p>
             <a:r>
-              <a:t>📘 SPIEGAZIONE PER IL DOCENTE:</a:t>
+              <a:t>⏱️ TIMING:</a:t>
+            </a:r>
+          </a:p>
+          <a:p>
+            <a:r>
+              <a:t>15 Minuti</a:t>
+            </a:r>
+          </a:p>
+          <a:p/>
+          <a:p>
+            <a:r>
+              <a:t>📘 GUIDA DOCENTE:</a:t>
             </a:r>
           </a:p>
           <a:p>
@@ -6155,7 +7899,7 @@
           <a:p/>
           <a:p>
             <a:r>
-              <a:t>💡 SUGGERIMENTI DI CONDUZIONE D'AULA:</a:t>
+              <a:t>💻 DEMO / LABORATORIO:</a:t>
             </a:r>
           </a:p>
           <a:p>
@@ -6163,10 +7907,26 @@
               <a:t>Mostrare la fluidità di navigazione tra le schede.</a:t>
             </a:r>
           </a:p>
+          <a:p>
+            <a:r>
+              <a:t>Esecuzione live della demo a schermo e affiancamento degli studenti nello svolgimento dell'esercitazione associata nel notebook/script di laboratorio.</a:t>
+            </a:r>
+          </a:p>
           <a:p/>
           <a:p>
             <a:r>
-              <a:t>❓ DOMANDE CHIAVE DA PORRE AGLI STUDENTI:</a:t>
+              <a:t>⚠️ ERRORI TIPICI:</a:t>
+            </a:r>
+          </a:p>
+          <a:p>
+            <a:r>
+              <a:t>Confusione sintattica tra formati, mancata gestione delle eccezioni o dimenticanza nell'uso di .copy() sulle viste dei dati.</a:t>
+            </a:r>
+          </a:p>
+          <a:p/>
+          <a:p>
+            <a:r>
+              <a:t>❓ DOMANDE AULA:</a:t>
             </a:r>
           </a:p>
           <a:p>
@@ -6241,13 +8001,29 @@
           <a:lstStyle/>
           <a:p>
             <a:r>
-              <a:t>⏱️ TEMPO STIMATO: 15 Minuti</a:t>
+              <a:t>🎯 OBIETTIVO DIDATTICO:</a:t>
+            </a:r>
+          </a:p>
+          <a:p>
+            <a:r>
+              <a:t>Spiegare perché centralizzare le logiche di calcolo evita disallineamenti contabili.</a:t>
             </a:r>
           </a:p>
           <a:p/>
           <a:p>
             <a:r>
-              <a:t>📘 SPIEGAZIONE PER IL DOCENTE:</a:t>
+              <a:t>⏱️ TIMING:</a:t>
+            </a:r>
+          </a:p>
+          <a:p>
+            <a:r>
+              <a:t>15 Minuti</a:t>
+            </a:r>
+          </a:p>
+          <a:p/>
+          <a:p>
+            <a:r>
+              <a:t>📘 GUIDA DOCENTE:</a:t>
             </a:r>
           </a:p>
           <a:p>
@@ -6258,7 +8034,7 @@
           <a:p/>
           <a:p>
             <a:r>
-              <a:t>💡 SUGGERIMENTI DI CONDUZIONE D'AULA:</a:t>
+              <a:t>💻 DEMO / LABORATORIO:</a:t>
             </a:r>
           </a:p>
           <a:p>
@@ -6266,10 +8042,26 @@
               <a:t>Invitare gli studenti a scrivere funzioni pure senza effetti collaterali (side-effects).</a:t>
             </a:r>
           </a:p>
+          <a:p>
+            <a:r>
+              <a:t>Esecuzione live della demo a schermo e affiancamento degli studenti nello svolgimento dell'esercitazione associata nel notebook/script di laboratorio.</a:t>
+            </a:r>
+          </a:p>
           <a:p/>
           <a:p>
             <a:r>
-              <a:t>❓ DOMANDE CHIAVE DA PORRE AGLI STUDENTI:</a:t>
+              <a:t>⚠️ ERRORI TIPICI:</a:t>
+            </a:r>
+          </a:p>
+          <a:p>
+            <a:r>
+              <a:t>Confusione sintattica tra formati, mancata gestione delle eccezioni o dimenticanza nell'uso di .copy() sulle viste dei dati.</a:t>
+            </a:r>
+          </a:p>
+          <a:p/>
+          <a:p>
+            <a:r>
+              <a:t>❓ DOMANDE AULA:</a:t>
             </a:r>
           </a:p>
           <a:p>
@@ -6344,13 +8136,29 @@
           <a:lstStyle/>
           <a:p>
             <a:r>
-              <a:t>⏱️ TEMPO STIMATO: 15 Minuti</a:t>
+              <a:t>🎯 OBIETTIVO DIDATTICO:</a:t>
+            </a:r>
+          </a:p>
+          <a:p>
+            <a:r>
+              <a:t>Far notare come i grafici cambino istantaneamente quando si filtrano le filiali nella sidebar.</a:t>
             </a:r>
           </a:p>
           <a:p/>
           <a:p>
             <a:r>
-              <a:t>📘 SPIEGAZIONE PER IL DOCENTE:</a:t>
+              <a:t>⏱️ TIMING:</a:t>
+            </a:r>
+          </a:p>
+          <a:p>
+            <a:r>
+              <a:t>15 Minuti</a:t>
+            </a:r>
+          </a:p>
+          <a:p/>
+          <a:p>
+            <a:r>
+              <a:t>📘 GUIDA DOCENTE:</a:t>
             </a:r>
           </a:p>
           <a:p>
@@ -6361,7 +8169,7 @@
           <a:p/>
           <a:p>
             <a:r>
-              <a:t>💡 SUGGERIMENTI DI CONDUZIONE D'AULA:</a:t>
+              <a:t>💻 DEMO / LABORATORIO:</a:t>
             </a:r>
           </a:p>
           <a:p>
@@ -6369,10 +8177,26 @@
               <a:t>Spiegare l'importanza di plt.close(fig) per evitare memory leak sul server.</a:t>
             </a:r>
           </a:p>
+          <a:p>
+            <a:r>
+              <a:t>Esecuzione live della demo a schermo e affiancamento degli studenti nello svolgimento dell'esercitazione associata nel notebook/script di laboratorio.</a:t>
+            </a:r>
+          </a:p>
           <a:p/>
           <a:p>
             <a:r>
-              <a:t>❓ DOMANDE CHIAVE DA PORRE AGLI STUDENTI:</a:t>
+              <a:t>⚠️ ERRORI TIPICI:</a:t>
+            </a:r>
+          </a:p>
+          <a:p>
+            <a:r>
+              <a:t>Confusione sintattica tra formati, mancata gestione delle eccezioni o dimenticanza nell'uso di .copy() sulle viste dei dati.</a:t>
+            </a:r>
+          </a:p>
+          <a:p/>
+          <a:p>
+            <a:r>
+              <a:t>❓ DOMANDE AULA:</a:t>
             </a:r>
           </a:p>
           <a:p>
@@ -6447,13 +8271,29 @@
           <a:lstStyle/>
           <a:p>
             <a:r>
-              <a:t>⏱️ TEMPO STIMATO: 15 Minuti</a:t>
+              <a:t>🎯 OBIETTIVO DIDATTICO:</a:t>
+            </a:r>
+          </a:p>
+          <a:p>
+            <a:r>
+              <a:t>Mostrare l'interattività della tabella st.</a:t>
             </a:r>
           </a:p>
           <a:p/>
           <a:p>
             <a:r>
-              <a:t>📘 SPIEGAZIONE PER IL DOCENTE:</a:t>
+              <a:t>⏱️ TIMING:</a:t>
+            </a:r>
+          </a:p>
+          <a:p>
+            <a:r>
+              <a:t>15 Minuti</a:t>
+            </a:r>
+          </a:p>
+          <a:p/>
+          <a:p>
+            <a:r>
+              <a:t>📘 GUIDA DOCENTE:</a:t>
             </a:r>
           </a:p>
           <a:p>
@@ -6464,7 +8304,7 @@
           <a:p/>
           <a:p>
             <a:r>
-              <a:t>💡 SUGGERIMENTI DI CONDUZIONE D'AULA:</a:t>
+              <a:t>💻 DEMO / LABORATORIO:</a:t>
             </a:r>
           </a:p>
           <a:p>
@@ -6472,10 +8312,26 @@
               <a:t>Far analizzare la concentrazione del fatturato sui top client.</a:t>
             </a:r>
           </a:p>
+          <a:p>
+            <a:r>
+              <a:t>Esecuzione live della demo a schermo e affiancamento degli studenti nello svolgimento dell'esercitazione associata nel notebook/script di laboratorio.</a:t>
+            </a:r>
+          </a:p>
           <a:p/>
           <a:p>
             <a:r>
-              <a:t>❓ DOMANDE CHIAVE DA PORRE AGLI STUDENTI:</a:t>
+              <a:t>⚠️ ERRORI TIPICI:</a:t>
+            </a:r>
+          </a:p>
+          <a:p>
+            <a:r>
+              <a:t>Confusione sintattica tra formati, mancata gestione delle eccezioni o dimenticanza nell'uso di .copy() sulle viste dei dati.</a:t>
+            </a:r>
+          </a:p>
+          <a:p/>
+          <a:p>
+            <a:r>
+              <a:t>❓ DOMANDE AULA:</a:t>
             </a:r>
           </a:p>
           <a:p>
@@ -6550,13 +8406,29 @@
           <a:lstStyle/>
           <a:p>
             <a:r>
-              <a:t>⏱️ TEMPO STIMATO: 15 Minuti</a:t>
+              <a:t>🎯 OBIETTIVO DIDATTICO:</a:t>
+            </a:r>
+          </a:p>
+          <a:p>
+            <a:r>
+              <a:t>Dimostrare la ricerca istantanea digitando 'Tech' o 'Server'.</a:t>
             </a:r>
           </a:p>
           <a:p/>
           <a:p>
             <a:r>
-              <a:t>📘 SPIEGAZIONE PER IL DOCENTE:</a:t>
+              <a:t>⏱️ TIMING:</a:t>
+            </a:r>
+          </a:p>
+          <a:p>
+            <a:r>
+              <a:t>15 Minuti</a:t>
+            </a:r>
+          </a:p>
+          <a:p/>
+          <a:p>
+            <a:r>
+              <a:t>📘 GUIDA DOCENTE:</a:t>
             </a:r>
           </a:p>
           <a:p>
@@ -6567,7 +8439,7 @@
           <a:p/>
           <a:p>
             <a:r>
-              <a:t>💡 SUGGERIMENTI DI CONDUZIONE D'AULA:</a:t>
+              <a:t>💻 DEMO / LABORATORIO:</a:t>
             </a:r>
           </a:p>
           <a:p>
@@ -6575,10 +8447,26 @@
               <a:t>Mostrare il funzionamento del download CSV.</a:t>
             </a:r>
           </a:p>
+          <a:p>
+            <a:r>
+              <a:t>Esecuzione live della demo a schermo e affiancamento degli studenti nello svolgimento dell'esercitazione associata nel notebook/script di laboratorio.</a:t>
+            </a:r>
+          </a:p>
           <a:p/>
           <a:p>
             <a:r>
-              <a:t>❓ DOMANDE CHIAVE DA PORRE AGLI STUDENTI:</a:t>
+              <a:t>⚠️ ERRORI TIPICI:</a:t>
+            </a:r>
+          </a:p>
+          <a:p>
+            <a:r>
+              <a:t>Confusione sintattica tra formati, mancata gestione delle eccezioni o dimenticanza nell'uso di .copy() sulle viste dei dati.</a:t>
+            </a:r>
+          </a:p>
+          <a:p/>
+          <a:p>
+            <a:r>
+              <a:t>❓ DOMANDE AULA:</a:t>
             </a:r>
           </a:p>
           <a:p>
@@ -6653,13 +8541,29 @@
           <a:lstStyle/>
           <a:p>
             <a:r>
-              <a:t>⏱️ TEMPO STIMATO: 15 Minuti</a:t>
+              <a:t>🎯 OBIETTIVO DIDATTICO:</a:t>
+            </a:r>
+          </a:p>
+          <a:p>
+            <a:r>
+              <a:t>Mostrare dal vivo come lo spostamento dello slider modifichi in tempo reale le previsioni di fatturato.</a:t>
             </a:r>
           </a:p>
           <a:p/>
           <a:p>
             <a:r>
-              <a:t>📘 SPIEGAZIONE PER IL DOCENTE:</a:t>
+              <a:t>⏱️ TIMING:</a:t>
+            </a:r>
+          </a:p>
+          <a:p>
+            <a:r>
+              <a:t>15 Minuti</a:t>
+            </a:r>
+          </a:p>
+          <a:p/>
+          <a:p>
+            <a:r>
+              <a:t>📘 GUIDA DOCENTE:</a:t>
             </a:r>
           </a:p>
           <a:p>
@@ -6670,7 +8574,7 @@
           <a:p/>
           <a:p>
             <a:r>
-              <a:t>💡 SUGGERIMENTI DI CONDUZIONE D'AULA:</a:t>
+              <a:t>💻 DEMO / LABORATORIO:</a:t>
             </a:r>
           </a:p>
           <a:p>
@@ -6678,10 +8582,26 @@
               <a:t>Far notare l'uso di .clip(0, 100) per evitare sconti negativi o superiori al 100%.</a:t>
             </a:r>
           </a:p>
+          <a:p>
+            <a:r>
+              <a:t>Esecuzione live della demo a schermo e affiancamento degli studenti nello svolgimento dell'esercitazione associata nel notebook/script di laboratorio.</a:t>
+            </a:r>
+          </a:p>
           <a:p/>
           <a:p>
             <a:r>
-              <a:t>❓ DOMANDE CHIAVE DA PORRE AGLI STUDENTI:</a:t>
+              <a:t>⚠️ ERRORI TIPICI:</a:t>
+            </a:r>
+          </a:p>
+          <a:p>
+            <a:r>
+              <a:t>Confusione sintattica tra formati, mancata gestione delle eccezioni o dimenticanza nell'uso di .copy() sulle viste dei dati.</a:t>
+            </a:r>
+          </a:p>
+          <a:p/>
+          <a:p>
+            <a:r>
+              <a:t>❓ DOMANDE AULA:</a:t>
             </a:r>
           </a:p>
           <a:p>
@@ -6756,13 +8676,29 @@
           <a:lstStyle/>
           <a:p>
             <a:r>
-              <a:t>⏱️ TEMPO STIMATO: 15 Minuti</a:t>
+              <a:t>🎯 OBIETTIVO DIDATTICO:</a:t>
+            </a:r>
+          </a:p>
+          <a:p>
+            <a:r>
+              <a:t>Mostrare come piccoli dettagli di stile rendano la web app accattivante e pronta per la presentazione ai vertici aziendali.</a:t>
             </a:r>
           </a:p>
           <a:p/>
           <a:p>
             <a:r>
-              <a:t>📘 SPIEGAZIONE PER IL DOCENTE:</a:t>
+              <a:t>⏱️ TIMING:</a:t>
+            </a:r>
+          </a:p>
+          <a:p>
+            <a:r>
+              <a:t>15 Minuti</a:t>
+            </a:r>
+          </a:p>
+          <a:p/>
+          <a:p>
+            <a:r>
+              <a:t>📘 GUIDA DOCENTE:</a:t>
             </a:r>
           </a:p>
           <a:p>
@@ -6773,7 +8709,7 @@
           <a:p/>
           <a:p>
             <a:r>
-              <a:t>💡 SUGGERIMENTI DI CONDUZIONE D'AULA:</a:t>
+              <a:t>💻 DEMO / LABORATORIO:</a:t>
             </a:r>
           </a:p>
           <a:p>
@@ -6781,10 +8717,26 @@
               <a:t>Far notare l'uso prudente di unsafe_allow_html.</a:t>
             </a:r>
           </a:p>
+          <a:p>
+            <a:r>
+              <a:t>Esecuzione live della demo a schermo e affiancamento degli studenti nello svolgimento dell'esercitazione associata nel notebook/script di laboratorio.</a:t>
+            </a:r>
+          </a:p>
           <a:p/>
           <a:p>
             <a:r>
-              <a:t>❓ DOMANDE CHIAVE DA PORRE AGLI STUDENTI:</a:t>
+              <a:t>⚠️ ERRORI TIPICI:</a:t>
+            </a:r>
+          </a:p>
+          <a:p>
+            <a:r>
+              <a:t>Confusione sintattica tra formati, mancata gestione delle eccezioni o dimenticanza nell'uso di .copy() sulle viste dei dati.</a:t>
+            </a:r>
+          </a:p>
+          <a:p/>
+          <a:p>
+            <a:r>
+              <a:t>❓ DOMANDE AULA:</a:t>
             </a:r>
           </a:p>
           <a:p>
@@ -6859,13 +8811,29 @@
           <a:lstStyle/>
           <a:p>
             <a:r>
-              <a:t>⏱️ TEMPO STIMATO: 90 Minuti</a:t>
+              <a:t>🎯 OBIETTIVO DIDATTICO:</a:t>
+            </a:r>
+          </a:p>
+          <a:p>
+            <a:r>
+              <a:t>Sessione di laboratorio intensiva di 1 ora e mezza.</a:t>
             </a:r>
           </a:p>
           <a:p/>
           <a:p>
             <a:r>
-              <a:t>📘 SPIEGAZIONE PER IL DOCENTE:</a:t>
+              <a:t>⏱️ TIMING:</a:t>
+            </a:r>
+          </a:p>
+          <a:p>
+            <a:r>
+              <a:t>90 Minuti</a:t>
+            </a:r>
+          </a:p>
+          <a:p/>
+          <a:p>
+            <a:r>
+              <a:t>📘 GUIDA DOCENTE:</a:t>
             </a:r>
           </a:p>
           <a:p>
@@ -6876,7 +8844,7 @@
           <a:p/>
           <a:p>
             <a:r>
-              <a:t>💡 SUGGERIMENTI DI CONDUZIONE D'AULA:</a:t>
+              <a:t>💻 DEMO / LABORATORIO:</a:t>
             </a:r>
           </a:p>
           <a:p>
@@ -6884,10 +8852,26 @@
               <a:t>Verificare che la dashboard si apra nel browser di tutti gli studenti.</a:t>
             </a:r>
           </a:p>
+          <a:p>
+            <a:r>
+              <a:t>Esecuzione live della demo a schermo e affiancamento degli studenti nello svolgimento dell'esercitazione associata nel notebook/script di laboratorio.</a:t>
+            </a:r>
+          </a:p>
           <a:p/>
           <a:p>
             <a:r>
-              <a:t>❓ DOMANDE CHIAVE DA PORRE AGLI STUDENTI:</a:t>
+              <a:t>⚠️ ERRORI TIPICI:</a:t>
+            </a:r>
+          </a:p>
+          <a:p>
+            <a:r>
+              <a:t>Confusione sintattica tra formati, mancata gestione delle eccezioni o dimenticanza nell'uso di .copy() sulle viste dei dati.</a:t>
+            </a:r>
+          </a:p>
+          <a:p/>
+          <a:p>
+            <a:r>
+              <a:t>❓ DOMANDE AULA:</a:t>
             </a:r>
           </a:p>
           <a:p>
@@ -6962,13 +8946,29 @@
           <a:lstStyle/>
           <a:p>
             <a:r>
-              <a:t>⏱️ TEMPO STIMATO: 10 Minuti</a:t>
+              <a:t>🎯 OBIETTIVO DIDATTICO:</a:t>
+            </a:r>
+          </a:p>
+          <a:p>
+            <a:r>
+              <a:t>Tirare le somme del modulo applicativo più importante prima della sessione di deploy sistemistico.</a:t>
             </a:r>
           </a:p>
           <a:p/>
           <a:p>
             <a:r>
-              <a:t>📘 SPIEGAZIONE PER IL DOCENTE:</a:t>
+              <a:t>⏱️ TIMING:</a:t>
+            </a:r>
+          </a:p>
+          <a:p>
+            <a:r>
+              <a:t>10 Minuti</a:t>
+            </a:r>
+          </a:p>
+          <a:p/>
+          <a:p>
+            <a:r>
+              <a:t>📘 GUIDA DOCENTE:</a:t>
             </a:r>
           </a:p>
           <a:p>
@@ -6979,7 +8979,7 @@
           <a:p/>
           <a:p>
             <a:r>
-              <a:t>💡 SUGGERIMENTI DI CONDUZIONE D'AULA:</a:t>
+              <a:t>💻 DEMO / LABORATORIO:</a:t>
             </a:r>
           </a:p>
           <a:p>
@@ -6987,10 +8987,26 @@
               <a:t>Introdurre l'importanza della disponibilità continua del dato.</a:t>
             </a:r>
           </a:p>
+          <a:p>
+            <a:r>
+              <a:t>Esecuzione live della demo a schermo e affiancamento degli studenti nello svolgimento dell'esercitazione associata nel notebook/script di laboratorio.</a:t>
+            </a:r>
+          </a:p>
           <a:p/>
           <a:p>
             <a:r>
-              <a:t>❓ DOMANDE CHIAVE DA PORRE AGLI STUDENTI:</a:t>
+              <a:t>⚠️ ERRORI TIPICI:</a:t>
+            </a:r>
+          </a:p>
+          <a:p>
+            <a:r>
+              <a:t>Confusione sintattica tra formati, mancata gestione delle eccezioni o dimenticanza nell'uso di .copy() sulle viste dei dati.</a:t>
+            </a:r>
+          </a:p>
+          <a:p/>
+          <a:p>
+            <a:r>
+              <a:t>❓ DOMANDE AULA:</a:t>
             </a:r>
           </a:p>
           <a:p>
@@ -7065,13 +9081,29 @@
           <a:lstStyle/>
           <a:p>
             <a:r>
-              <a:t>⏱️ TEMPO STIMATO: 15 Minuti</a:t>
+              <a:t>🎯 OBIETTIVO DIDATTICO:</a:t>
+            </a:r>
+          </a:p>
+          <a:p>
+            <a:r>
+              <a:t>Iniziare la sessione di Live Demo collegandosi in diretta SSH al server Linux.</a:t>
             </a:r>
           </a:p>
           <a:p/>
           <a:p>
             <a:r>
-              <a:t>📘 SPIEGAZIONE PER IL DOCENTE:</a:t>
+              <a:t>⏱️ TIMING:</a:t>
+            </a:r>
+          </a:p>
+          <a:p>
+            <a:r>
+              <a:t>15 Minuti</a:t>
+            </a:r>
+          </a:p>
+          <a:p/>
+          <a:p>
+            <a:r>
+              <a:t>📘 GUIDA DOCENTE:</a:t>
             </a:r>
           </a:p>
           <a:p>
@@ -7082,7 +9114,7 @@
           <a:p/>
           <a:p>
             <a:r>
-              <a:t>💡 SUGGERIMENTI DI CONDUZIONE D'AULA:</a:t>
+              <a:t>💻 DEMO / LABORATORIO:</a:t>
             </a:r>
           </a:p>
           <a:p>
@@ -7090,10 +9122,26 @@
               <a:t>Mostrare lo schema dei 3 livelli architetturali.</a:t>
             </a:r>
           </a:p>
+          <a:p>
+            <a:r>
+              <a:t>Esecuzione live della demo a schermo e affiancamento degli studenti nello svolgimento dell'esercitazione associata nel notebook/script di laboratorio.</a:t>
+            </a:r>
+          </a:p>
           <a:p/>
           <a:p>
             <a:r>
-              <a:t>❓ DOMANDE CHIAVE DA PORRE AGLI STUDENTI:</a:t>
+              <a:t>⚠️ ERRORI TIPICI:</a:t>
+            </a:r>
+          </a:p>
+          <a:p>
+            <a:r>
+              <a:t>Confusione sintattica tra formati, mancata gestione delle eccezioni o dimenticanza nell'uso di .copy() sulle viste dei dati.</a:t>
+            </a:r>
+          </a:p>
+          <a:p/>
+          <a:p>
+            <a:r>
+              <a:t>❓ DOMANDE AULA:</a:t>
             </a:r>
           </a:p>
           <a:p>
@@ -7168,13 +9216,29 @@
           <a:lstStyle/>
           <a:p>
             <a:r>
-              <a:t>⏱️ TEMPO STIMATO: 15 Minuti</a:t>
+              <a:t>🎯 OBIETTIVO DIDATTICO:</a:t>
+            </a:r>
+          </a:p>
+          <a:p>
+            <a:r>
+              <a:t>Mostrare la creazione del file.</a:t>
             </a:r>
           </a:p>
           <a:p/>
           <a:p>
             <a:r>
-              <a:t>📘 SPIEGAZIONE PER IL DOCENTE:</a:t>
+              <a:t>⏱️ TIMING:</a:t>
+            </a:r>
+          </a:p>
+          <a:p>
+            <a:r>
+              <a:t>15 Minuti</a:t>
+            </a:r>
+          </a:p>
+          <a:p/>
+          <a:p>
+            <a:r>
+              <a:t>📘 GUIDA DOCENTE:</a:t>
             </a:r>
           </a:p>
           <a:p>
@@ -7185,7 +9249,7 @@
           <a:p/>
           <a:p>
             <a:r>
-              <a:t>💡 SUGGERIMENTI DI CONDUZIONE D'AULA:</a:t>
+              <a:t>💻 DEMO / LABORATORIO:</a:t>
             </a:r>
           </a:p>
           <a:p>
@@ -7193,10 +9257,26 @@
               <a:t>Evidenziare l'importanza di eseguire il servizio con utente non-root per sicurezza.</a:t>
             </a:r>
           </a:p>
+          <a:p>
+            <a:r>
+              <a:t>Esecuzione live della demo a schermo e affiancamento degli studenti nello svolgimento dell'esercitazione associata nel notebook/script di laboratorio.</a:t>
+            </a:r>
+          </a:p>
           <a:p/>
           <a:p>
             <a:r>
-              <a:t>❓ DOMANDE CHIAVE DA PORRE AGLI STUDENTI:</a:t>
+              <a:t>⚠️ ERRORI TIPICI:</a:t>
+            </a:r>
+          </a:p>
+          <a:p>
+            <a:r>
+              <a:t>Confusione sintattica tra formati, mancata gestione delle eccezioni o dimenticanza nell'uso di .copy() sulle viste dei dati.</a:t>
+            </a:r>
+          </a:p>
+          <a:p/>
+          <a:p>
+            <a:r>
+              <a:t>❓ DOMANDE AULA:</a:t>
             </a:r>
           </a:p>
           <a:p>
@@ -7271,13 +9351,29 @@
           <a:lstStyle/>
           <a:p>
             <a:r>
-              <a:t>⏱️ TEMPO STIMATO: 15 Minuti</a:t>
+              <a:t>🎯 OBIETTIVO DIDATTICO:</a:t>
+            </a:r>
+          </a:p>
+          <a:p>
+            <a:r>
+              <a:t>Eseguire i comandi systemctl in diretta terminale e mostrare lo stato 'active (running)' verde.</a:t>
             </a:r>
           </a:p>
           <a:p/>
           <a:p>
             <a:r>
-              <a:t>📘 SPIEGAZIONE PER IL DOCENTE:</a:t>
+              <a:t>⏱️ TIMING:</a:t>
+            </a:r>
+          </a:p>
+          <a:p>
+            <a:r>
+              <a:t>15 Minuti</a:t>
+            </a:r>
+          </a:p>
+          <a:p/>
+          <a:p>
+            <a:r>
+              <a:t>📘 GUIDA DOCENTE:</a:t>
             </a:r>
           </a:p>
           <a:p>
@@ -7288,7 +9384,7 @@
           <a:p/>
           <a:p>
             <a:r>
-              <a:t>💡 SUGGERIMENTI DI CONDUZIONE D'AULA:</a:t>
+              <a:t>💻 DEMO / LABORATORIO:</a:t>
             </a:r>
           </a:p>
           <a:p>
@@ -7296,10 +9392,26 @@
               <a:t>Simulare un riavvio con systemctl restart.</a:t>
             </a:r>
           </a:p>
+          <a:p>
+            <a:r>
+              <a:t>Esecuzione live della demo a schermo e affiancamento degli studenti nello svolgimento dell'esercitazione associata nel notebook/script di laboratorio.</a:t>
+            </a:r>
+          </a:p>
           <a:p/>
           <a:p>
             <a:r>
-              <a:t>❓ DOMANDE CHIAVE DA PORRE AGLI STUDENTI:</a:t>
+              <a:t>⚠️ ERRORI TIPICI:</a:t>
+            </a:r>
+          </a:p>
+          <a:p>
+            <a:r>
+              <a:t>Confusione sintattica tra formati, mancata gestione delle eccezioni o dimenticanza nell'uso di .copy() sulle viste dei dati.</a:t>
+            </a:r>
+          </a:p>
+          <a:p/>
+          <a:p>
+            <a:r>
+              <a:t>❓ DOMANDE AULA:</a:t>
             </a:r>
           </a:p>
           <a:p>
@@ -7374,13 +9486,29 @@
           <a:lstStyle/>
           <a:p>
             <a:r>
-              <a:t>⏱️ TEMPO STIMATO: 45 Minuti</a:t>
+              <a:t>🎯 OBIETTIVO DIDATTICO:</a:t>
+            </a:r>
+          </a:p>
+          <a:p>
+            <a:r>
+              <a:t>Sessione hands-on guidata di 45 minuti.</a:t>
             </a:r>
           </a:p>
           <a:p/>
           <a:p>
             <a:r>
-              <a:t>📘 SPIEGAZIONE PER IL DOCENTE:</a:t>
+              <a:t>⏱️ TIMING:</a:t>
+            </a:r>
+          </a:p>
+          <a:p>
+            <a:r>
+              <a:t>45 Minuti</a:t>
+            </a:r>
+          </a:p>
+          <a:p/>
+          <a:p>
+            <a:r>
+              <a:t>📘 GUIDA DOCENTE:</a:t>
             </a:r>
           </a:p>
           <a:p>
@@ -7391,7 +9519,7 @@
           <a:p/>
           <a:p>
             <a:r>
-              <a:t>💡 SUGGERIMENTI DI CONDUZIONE D'AULA:</a:t>
+              <a:t>💻 DEMO / LABORATORIO:</a:t>
             </a:r>
           </a:p>
           <a:p>
@@ -7399,10 +9527,26 @@
               <a:t>Verificare che gli studenti abbiano attivato il virtualenv prima di lanciare lo script.</a:t>
             </a:r>
           </a:p>
+          <a:p>
+            <a:r>
+              <a:t>Esecuzione live della demo a schermo e affiancamento degli studenti nello svolgimento dell'esercitazione associata nel notebook/script di laboratorio.</a:t>
+            </a:r>
+          </a:p>
           <a:p/>
           <a:p>
             <a:r>
-              <a:t>❓ DOMANDE CHIAVE DA PORRE AGLI STUDENTI:</a:t>
+              <a:t>⚠️ ERRORI TIPICI:</a:t>
+            </a:r>
+          </a:p>
+          <a:p>
+            <a:r>
+              <a:t>Confusione sintattica tra formati, mancata gestione delle eccezioni o dimenticanza nell'uso di .copy() sulle viste dei dati.</a:t>
+            </a:r>
+          </a:p>
+          <a:p/>
+          <a:p>
+            <a:r>
+              <a:t>❓ DOMANDE AULA:</a:t>
             </a:r>
           </a:p>
           <a:p>
@@ -7477,13 +9621,29 @@
           <a:lstStyle/>
           <a:p>
             <a:r>
-              <a:t>⏱️ TEMPO STIMATO: 15 Minuti</a:t>
+              <a:t>🎯 OBIETTIVO DIDATTICO:</a:t>
+            </a:r>
+          </a:p>
+          <a:p>
+            <a:r>
+              <a:t>Concludere la Live Demo simulando una connessione browser e mostrando le righe di log che compaiono in streaming nel terminale.</a:t>
             </a:r>
           </a:p>
           <a:p/>
           <a:p>
             <a:r>
-              <a:t>📘 SPIEGAZIONE PER IL DOCENTE:</a:t>
+              <a:t>⏱️ TIMING:</a:t>
+            </a:r>
+          </a:p>
+          <a:p>
+            <a:r>
+              <a:t>15 Minuti</a:t>
+            </a:r>
+          </a:p>
+          <a:p/>
+          <a:p>
+            <a:r>
+              <a:t>📘 GUIDA DOCENTE:</a:t>
             </a:r>
           </a:p>
           <a:p>
@@ -7494,7 +9654,7 @@
           <a:p/>
           <a:p>
             <a:r>
-              <a:t>💡 SUGGERIMENTI DI CONDUZIONE D'AULA:</a:t>
+              <a:t>💻 DEMO / LABORATORIO:</a:t>
             </a:r>
           </a:p>
           <a:p>
@@ -7502,10 +9662,26 @@
               <a:t>Mostrare la guida operativa completa in guida_deploy.md.</a:t>
             </a:r>
           </a:p>
+          <a:p>
+            <a:r>
+              <a:t>Esecuzione live della demo a schermo e affiancamento degli studenti nello svolgimento dell'esercitazione associata nel notebook/script di laboratorio.</a:t>
+            </a:r>
+          </a:p>
           <a:p/>
           <a:p>
             <a:r>
-              <a:t>❓ DOMANDE CHIAVE DA PORRE AGLI STUDENTI:</a:t>
+              <a:t>⚠️ ERRORI TIPICI:</a:t>
+            </a:r>
+          </a:p>
+          <a:p>
+            <a:r>
+              <a:t>Confusione sintattica tra formati, mancata gestione delle eccezioni o dimenticanza nell'uso di .copy() sulle viste dei dati.</a:t>
+            </a:r>
+          </a:p>
+          <a:p/>
+          <a:p>
+            <a:r>
+              <a:t>❓ DOMANDE AULA:</a:t>
             </a:r>
           </a:p>
           <a:p>
@@ -7580,13 +9756,29 @@
           <a:lstStyle/>
           <a:p>
             <a:r>
-              <a:t>⏱️ TEMPO STIMATO: 15 Minuti</a:t>
+              <a:t>🎯 OBIETTIVO DIDATTICO:</a:t>
+            </a:r>
+          </a:p>
+          <a:p>
+            <a:r>
+              <a:t>Lanciare la sessione di esame / Project Work finale di 3 ore.</a:t>
             </a:r>
           </a:p>
           <a:p/>
           <a:p>
             <a:r>
-              <a:t>📘 SPIEGAZIONE PER IL DOCENTE:</a:t>
+              <a:t>⏱️ TIMING:</a:t>
+            </a:r>
+          </a:p>
+          <a:p>
+            <a:r>
+              <a:t>15 Minuti</a:t>
+            </a:r>
+          </a:p>
+          <a:p/>
+          <a:p>
+            <a:r>
+              <a:t>📘 GUIDA DOCENTE:</a:t>
             </a:r>
           </a:p>
           <a:p>
@@ -7597,7 +9789,7 @@
           <a:p/>
           <a:p>
             <a:r>
-              <a:t>💡 SUGGERIMENTI DI CONDUZIONE D'AULA:</a:t>
+              <a:t>💻 DEMO / LABORATORIO:</a:t>
             </a:r>
           </a:p>
           <a:p>
@@ -7605,10 +9797,26 @@
               <a:t>Presentare la traccia formale in project_work/traccia_studenti.md.</a:t>
             </a:r>
           </a:p>
+          <a:p>
+            <a:r>
+              <a:t>Esecuzione live della demo a schermo e affiancamento degli studenti nello svolgimento dell'esercitazione associata nel notebook/script di laboratorio.</a:t>
+            </a:r>
+          </a:p>
           <a:p/>
           <a:p>
             <a:r>
-              <a:t>❓ DOMANDE CHIAVE DA PORRE AGLI STUDENTI:</a:t>
+              <a:t>⚠️ ERRORI TIPICI:</a:t>
+            </a:r>
+          </a:p>
+          <a:p>
+            <a:r>
+              <a:t>Confusione sintattica tra formati, mancata gestione delle eccezioni o dimenticanza nell'uso di .copy() sulle viste dei dati.</a:t>
+            </a:r>
+          </a:p>
+          <a:p/>
+          <a:p>
+            <a:r>
+              <a:t>❓ DOMANDE AULA:</a:t>
             </a:r>
           </a:p>
           <a:p>
@@ -7683,13 +9891,29 @@
           <a:lstStyle/>
           <a:p>
             <a:r>
-              <a:t>⏱️ TEMPO STIMATO: 15 Minuti</a:t>
+              <a:t>🎯 OBIETTIVO DIDATTICO:</a:t>
+            </a:r>
+          </a:p>
+          <a:p>
+            <a:r>
+              <a:t>Chiarire i criteri di valutazione e i deliverable attesi da ciascun gruppo.</a:t>
             </a:r>
           </a:p>
           <a:p/>
           <a:p>
             <a:r>
-              <a:t>📘 SPIEGAZIONE PER IL DOCENTE:</a:t>
+              <a:t>⏱️ TIMING:</a:t>
+            </a:r>
+          </a:p>
+          <a:p>
+            <a:r>
+              <a:t>15 Minuti</a:t>
+            </a:r>
+          </a:p>
+          <a:p/>
+          <a:p>
+            <a:r>
+              <a:t>📘 GUIDA DOCENTE:</a:t>
             </a:r>
           </a:p>
           <a:p>
@@ -7700,7 +9924,7 @@
           <a:p/>
           <a:p>
             <a:r>
-              <a:t>💡 SUGGERIMENTI DI CONDUZIONE D'AULA:</a:t>
+              <a:t>💻 DEMO / LABORATORIO:</a:t>
             </a:r>
           </a:p>
           <a:p>
@@ -7708,10 +9932,26 @@
               <a:t>Spiegare la rubrica presente in project_work/criteri_valutazione.md.</a:t>
             </a:r>
           </a:p>
+          <a:p>
+            <a:r>
+              <a:t>Esecuzione live della demo a schermo e affiancamento degli studenti nello svolgimento dell'esercitazione associata nel notebook/script di laboratorio.</a:t>
+            </a:r>
+          </a:p>
           <a:p/>
           <a:p>
             <a:r>
-              <a:t>❓ DOMANDE CHIAVE DA PORRE AGLI STUDENTI:</a:t>
+              <a:t>⚠️ ERRORI TIPICI:</a:t>
+            </a:r>
+          </a:p>
+          <a:p>
+            <a:r>
+              <a:t>Confusione sintattica tra formati, mancata gestione delle eccezioni o dimenticanza nell'uso di .copy() sulle viste dei dati.</a:t>
+            </a:r>
+          </a:p>
+          <a:p/>
+          <a:p>
+            <a:r>
+              <a:t>❓ DOMANDE AULA:</a:t>
             </a:r>
           </a:p>
           <a:p>
@@ -7786,13 +10026,29 @@
           <a:lstStyle/>
           <a:p>
             <a:r>
-              <a:t>⏱️ TEMPO STIMATO: 120 Minuti</a:t>
+              <a:t>🎯 OBIETTIVO DIDATTICO:</a:t>
+            </a:r>
+          </a:p>
+          <a:p>
+            <a:r>
+              <a:t>Sessione di sviluppo autonomo di 120 minuti.</a:t>
             </a:r>
           </a:p>
           <a:p/>
           <a:p>
             <a:r>
-              <a:t>📘 SPIEGAZIONE PER IL DOCENTE:</a:t>
+              <a:t>⏱️ TIMING:</a:t>
+            </a:r>
+          </a:p>
+          <a:p>
+            <a:r>
+              <a:t>120 Minuti</a:t>
+            </a:r>
+          </a:p>
+          <a:p/>
+          <a:p>
+            <a:r>
+              <a:t>📘 GUIDA DOCENTE:</a:t>
             </a:r>
           </a:p>
           <a:p>
@@ -7803,7 +10059,7 @@
           <a:p/>
           <a:p>
             <a:r>
-              <a:t>💡 SUGGERIMENTI DI CONDUZIONE D'AULA:</a:t>
+              <a:t>💻 DEMO / LABORATORIO:</a:t>
             </a:r>
           </a:p>
           <a:p>
@@ -7811,10 +10067,26 @@
               <a:t>Verificare che tutti riescano ad agganciare correttamente il foglio Anagrafica_Clienti di Napoli.</a:t>
             </a:r>
           </a:p>
+          <a:p>
+            <a:r>
+              <a:t>Esecuzione live della demo a schermo e affiancamento degli studenti nello svolgimento dell'esercitazione associata nel notebook/script di laboratorio.</a:t>
+            </a:r>
+          </a:p>
           <a:p/>
           <a:p>
             <a:r>
-              <a:t>❓ DOMANDE CHIAVE DA PORRE AGLI STUDENTI:</a:t>
+              <a:t>⚠️ ERRORI TIPICI:</a:t>
+            </a:r>
+          </a:p>
+          <a:p>
+            <a:r>
+              <a:t>Confusione sintattica tra formati, mancata gestione delle eccezioni o dimenticanza nell'uso di .copy() sulle viste dei dati.</a:t>
+            </a:r>
+          </a:p>
+          <a:p/>
+          <a:p>
+            <a:r>
+              <a:t>❓ DOMANDE AULA:</a:t>
             </a:r>
           </a:p>
           <a:p>
@@ -7889,13 +10161,29 @@
           <a:lstStyle/>
           <a:p>
             <a:r>
-              <a:t>⏱️ TEMPO STIMATO: 30 Minuti</a:t>
+              <a:t>🎯 OBIETTIVO DIDATTICO:</a:t>
+            </a:r>
+          </a:p>
+          <a:p>
+            <a:r>
+              <a:t>Conduzione della tavola rotonda di presentazione: far esporre i risultati a turno ai rappresentanti dei gruppi.</a:t>
             </a:r>
           </a:p>
           <a:p/>
           <a:p>
             <a:r>
-              <a:t>📘 SPIEGAZIONE PER IL DOCENTE:</a:t>
+              <a:t>⏱️ TIMING:</a:t>
+            </a:r>
+          </a:p>
+          <a:p>
+            <a:r>
+              <a:t>30 Minuti</a:t>
+            </a:r>
+          </a:p>
+          <a:p/>
+          <a:p>
+            <a:r>
+              <a:t>📘 GUIDA DOCENTE:</a:t>
             </a:r>
           </a:p>
           <a:p>
@@ -7906,7 +10194,7 @@
           <a:p/>
           <a:p>
             <a:r>
-              <a:t>💡 SUGGERIMENTI DI CONDUZIONE D'AULA:</a:t>
+              <a:t>💻 DEMO / LABORATORIO:</a:t>
             </a:r>
           </a:p>
           <a:p>
@@ -7914,10 +10202,26 @@
               <a:t>Confrontare i grafici prodotti dai vari team.</a:t>
             </a:r>
           </a:p>
+          <a:p>
+            <a:r>
+              <a:t>Esecuzione live della demo a schermo e affiancamento degli studenti nello svolgimento dell'esercitazione associata nel notebook/script di laboratorio.</a:t>
+            </a:r>
+          </a:p>
           <a:p/>
           <a:p>
             <a:r>
-              <a:t>❓ DOMANDE CHIAVE DA PORRE AGLI STUDENTI:</a:t>
+              <a:t>⚠️ ERRORI TIPICI:</a:t>
+            </a:r>
+          </a:p>
+          <a:p>
+            <a:r>
+              <a:t>Confusione sintattica tra formati, mancata gestione delle eccezioni o dimenticanza nell'uso di .copy() sulle viste dei dati.</a:t>
+            </a:r>
+          </a:p>
+          <a:p/>
+          <a:p>
+            <a:r>
+              <a:t>❓ DOMANDE AULA:</a:t>
             </a:r>
           </a:p>
           <a:p>
@@ -7992,13 +10296,29 @@
           <a:lstStyle/>
           <a:p>
             <a:r>
-              <a:t>⏱️ TEMPO STIMATO: 15 Minuti</a:t>
+              <a:t>🎯 OBIETTIVO DIDATTICO:</a:t>
+            </a:r>
+          </a:p>
+          <a:p>
+            <a:r>
+              <a:t>Slide conclusiva del corso.</a:t>
             </a:r>
           </a:p>
           <a:p/>
           <a:p>
             <a:r>
-              <a:t>📘 SPIEGAZIONE PER IL DOCENTE:</a:t>
+              <a:t>⏱️ TIMING:</a:t>
+            </a:r>
+          </a:p>
+          <a:p>
+            <a:r>
+              <a:t>15 Minuti</a:t>
+            </a:r>
+          </a:p>
+          <a:p/>
+          <a:p>
+            <a:r>
+              <a:t>📘 GUIDA DOCENTE:</a:t>
             </a:r>
           </a:p>
           <a:p>
@@ -8009,7 +10329,7 @@
           <a:p/>
           <a:p>
             <a:r>
-              <a:t>💡 SUGGERIMENTI DI CONDUZIONE D'AULA:</a:t>
+              <a:t>💻 DEMO / LABORATORIO:</a:t>
             </a:r>
           </a:p>
           <a:p>
@@ -8017,10 +10337,26 @@
               <a:t>Invitare gli studenti a usare il repository come cassetta degli attrezzi per il loro lavoro quotidiano.</a:t>
             </a:r>
           </a:p>
+          <a:p>
+            <a:r>
+              <a:t>Esecuzione live della demo a schermo e affiancamento degli studenti nello svolgimento dell'esercitazione associata nel notebook/script di laboratorio.</a:t>
+            </a:r>
+          </a:p>
           <a:p/>
           <a:p>
             <a:r>
-              <a:t>❓ DOMANDE CHIAVE DA PORRE AGLI STUDENTI:</a:t>
+              <a:t>⚠️ ERRORI TIPICI:</a:t>
+            </a:r>
+          </a:p>
+          <a:p>
+            <a:r>
+              <a:t>Confusione sintattica tra formati, mancata gestione delle eccezioni o dimenticanza nell'uso di .copy() sulle viste dei dati.</a:t>
+            </a:r>
+          </a:p>
+          <a:p/>
+          <a:p>
+            <a:r>
+              <a:t>❓ DOMANDE AULA:</a:t>
             </a:r>
           </a:p>
           <a:p>
@@ -8095,13 +10431,29 @@
           <a:lstStyle/>
           <a:p>
             <a:r>
-              <a:t>⏱️ TEMPO STIMATO: 10 Minuti</a:t>
+              <a:t>🎯 OBIETTIVO DIDATTICO:</a:t>
+            </a:r>
+          </a:p>
+          <a:p>
+            <a:r>
+              <a:t>Punto di raccordo teorico-pratico: tirare le somme prima di passare alla potenza di calcolo di Pandas.</a:t>
             </a:r>
           </a:p>
           <a:p/>
           <a:p>
             <a:r>
-              <a:t>📘 SPIEGAZIONE PER IL DOCENTE:</a:t>
+              <a:t>⏱️ TIMING:</a:t>
+            </a:r>
+          </a:p>
+          <a:p>
+            <a:r>
+              <a:t>10 Minuti</a:t>
+            </a:r>
+          </a:p>
+          <a:p/>
+          <a:p>
+            <a:r>
+              <a:t>📘 GUIDA DOCENTE:</a:t>
             </a:r>
           </a:p>
           <a:p>
@@ -8112,7 +10464,7 @@
           <a:p/>
           <a:p>
             <a:r>
-              <a:t>💡 SUGGERIMENTI DI CONDUZIONE D'AULA:</a:t>
+              <a:t>💻 DEMO / LABORATORIO:</a:t>
             </a:r>
           </a:p>
           <a:p>
@@ -8120,10 +10472,26 @@
               <a:t>Sottolineare che la logica imparata con i dizionari è la base concettuale dei DataFrame.</a:t>
             </a:r>
           </a:p>
+          <a:p>
+            <a:r>
+              <a:t>Esecuzione live della demo a schermo e affiancamento degli studenti nello svolgimento dell'esercitazione associata nel notebook/script di laboratorio.</a:t>
+            </a:r>
+          </a:p>
           <a:p/>
           <a:p>
             <a:r>
-              <a:t>❓ DOMANDE CHIAVE DA PORRE AGLI STUDENTI:</a:t>
+              <a:t>⚠️ ERRORI TIPICI:</a:t>
+            </a:r>
+          </a:p>
+          <a:p>
+            <a:r>
+              <a:t>Confusione sintattica tra formati, mancata gestione delle eccezioni o dimenticanza nell'uso di .copy() sulle viste dei dati.</a:t>
+            </a:r>
+          </a:p>
+          <a:p/>
+          <a:p>
+            <a:r>
+              <a:t>❓ DOMANDE AULA:</a:t>
             </a:r>
           </a:p>
           <a:p>
@@ -8198,13 +10566,29 @@
           <a:lstStyle/>
           <a:p>
             <a:r>
-              <a:t>⏱️ TEMPO STIMATO: 15 Minuti</a:t>
+              <a:t>🎯 OBIETTIVO DIDATTICO:</a:t>
+            </a:r>
+          </a:p>
+          <a:p>
+            <a:r>
+              <a:t>Introdurre Pandas e confrontarlo operativamente con Excel.</a:t>
             </a:r>
           </a:p>
           <a:p/>
           <a:p>
             <a:r>
-              <a:t>📘 SPIEGAZIONE PER IL DOCENTE:</a:t>
+              <a:t>⏱️ TIMING:</a:t>
+            </a:r>
+          </a:p>
+          <a:p>
+            <a:r>
+              <a:t>15 Minuti</a:t>
+            </a:r>
+          </a:p>
+          <a:p/>
+          <a:p>
+            <a:r>
+              <a:t>📘 GUIDA DOCENTE:</a:t>
             </a:r>
           </a:p>
           <a:p>
@@ -8215,7 +10599,7 @@
           <a:p/>
           <a:p>
             <a:r>
-              <a:t>💡 SUGGERIMENTI DI CONDUZIONE D'AULA:</a:t>
+              <a:t>💻 DEMO / LABORATORIO:</a:t>
             </a:r>
           </a:p>
           <a:p>
@@ -8223,10 +10607,26 @@
               <a:t>Far eseguire il primo import a tutti gli studenti.</a:t>
             </a:r>
           </a:p>
+          <a:p>
+            <a:r>
+              <a:t>Esecuzione live della demo a schermo e affiancamento degli studenti nello svolgimento dell'esercitazione associata nel notebook/script di laboratorio.</a:t>
+            </a:r>
+          </a:p>
           <a:p/>
           <a:p>
             <a:r>
-              <a:t>❓ DOMANDE CHIAVE DA PORRE AGLI STUDENTI:</a:t>
+              <a:t>⚠️ ERRORI TIPICI:</a:t>
+            </a:r>
+          </a:p>
+          <a:p>
+            <a:r>
+              <a:t>Confusione sintattica tra formati, mancata gestione delle eccezioni o dimenticanza nell'uso di .copy() sulle viste dei dati.</a:t>
+            </a:r>
+          </a:p>
+          <a:p/>
+          <a:p>
+            <a:r>
+              <a:t>❓ DOMANDE AULA:</a:t>
             </a:r>
           </a:p>
           <a:p>
